--- a/docs/expomaqser-2026/Mas_alla_de_la_maquinaria_EXPOMAQSER_2026.pptx
+++ b/docs/expomaqser-2026/Mas_alla_de_la_maquinaria_EXPOMAQSER_2026.pptx
@@ -4495,6 +4495,14 @@
 <file path=ppt/slides/slide1.xml><?xml version="1.0" encoding="utf-8"?>
 <p:sld xmlns:a="http://schemas.openxmlformats.org/drawingml/2006/main" xmlns:p="http://schemas.openxmlformats.org/presentationml/2006/main" xmlns:r="http://schemas.openxmlformats.org/officeDocument/2006/relationships">
   <p:cSld>
+    <p:bg>
+      <p:bgPr>
+        <a:solidFill>
+          <a:srgbClr val="132334"/>
+        </a:solidFill>
+        <a:effectLst/>
+      </p:bgPr>
+    </p:bg>
     <p:spTree>
       <p:nvGrpSpPr>
         <p:cNvPr id="1" name=""/>
@@ -4504,20 +4512,184 @@
       <p:grpSpPr/>
       <p:sp>
         <p:nvSpPr>
-          <p:cNvPr id="2" name="Rectangle 1"/>
+          <p:cNvPr id="2" name="TextBox 1"/>
+          <p:cNvSpPr txBox="1"/>
+          <p:nvPr/>
+        </p:nvSpPr>
+        <p:spPr>
+          <a:xfrm>
+            <a:off x="594360" y="347472"/>
+            <a:ext cx="7680960" cy="1097280"/>
+          </a:xfrm>
+          <a:prstGeom prst="rect">
+            <a:avLst/>
+          </a:prstGeom>
+          <a:noFill/>
+        </p:spPr>
+        <p:txBody>
+          <a:bodyPr wrap="none">
+            <a:spAutoFit/>
+          </a:bodyPr>
+          <a:lstStyle/>
+          <a:p>
+            <a:pPr>
+              <a:defRPr sz="3000" b="1">
+                <a:solidFill>
+                  <a:srgbClr val="FFFFFF"/>
+                </a:solidFill>
+              </a:defRPr>
+            </a:pPr>
+            <a:r>
+              <a:t>Más allá de la maquinaria</a:t>
+            </a:r>
+          </a:p>
+        </p:txBody>
+      </p:sp>
+      <p:sp>
+        <p:nvSpPr>
+          <p:cNvPr id="3" name="TextBox 2"/>
+          <p:cNvSpPr txBox="1"/>
+          <p:nvPr/>
+        </p:nvSpPr>
+        <p:spPr>
+          <a:xfrm>
+            <a:off x="621792" y="987552"/>
+            <a:ext cx="7772400" cy="731520"/>
+          </a:xfrm>
+          <a:prstGeom prst="rect">
+            <a:avLst/>
+          </a:prstGeom>
+          <a:noFill/>
+        </p:spPr>
+        <p:txBody>
+          <a:bodyPr wrap="none">
+            <a:spAutoFit/>
+          </a:bodyPr>
+          <a:lstStyle/>
+          <a:p>
+            <a:pPr>
+              <a:defRPr sz="1400">
+                <a:solidFill>
+                  <a:srgbClr val="FFFFFF"/>
+                </a:solidFill>
+              </a:defRPr>
+            </a:pPr>
+            <a:r>
+              <a:t>EXPOMAQSER 2026 | Guayaquil | Estudiantes + sector constructor e inmobiliario</a:t>
+            </a:r>
+          </a:p>
+        </p:txBody>
+      </p:sp>
+      <p:sp>
+        <p:nvSpPr>
+          <p:cNvPr id="4" name="TextBox 3"/>
+          <p:cNvSpPr txBox="1"/>
+          <p:nvPr/>
+        </p:nvSpPr>
+        <p:spPr>
+          <a:xfrm>
+            <a:off x="731520" y="1965960"/>
+            <a:ext cx="6217920" cy="1097280"/>
+          </a:xfrm>
+          <a:prstGeom prst="rect">
+            <a:avLst/>
+          </a:prstGeom>
+          <a:noFill/>
+        </p:spPr>
+        <p:txBody>
+          <a:bodyPr wrap="none">
+            <a:spAutoFit/>
+          </a:bodyPr>
+          <a:lstStyle/>
+          <a:p>
+            <a:pPr>
+              <a:defRPr sz="2300" b="1">
+                <a:solidFill>
+                  <a:srgbClr val="FFFFFF"/>
+                </a:solidFill>
+              </a:defRPr>
+            </a:pPr>
+            <a:r>
+              <a:t>La ventaja competitiva en 2026 no está solo en equipos:</a:t>
+            </a:r>
+          </a:p>
+        </p:txBody>
+      </p:sp>
+      <p:sp>
+        <p:nvSpPr>
+          <p:cNvPr id="5" name="TextBox 4"/>
+          <p:cNvSpPr txBox="1"/>
+          <p:nvPr/>
+        </p:nvSpPr>
+        <p:spPr>
+          <a:xfrm>
+            <a:off x="731520" y="2971800"/>
+            <a:ext cx="6309360" cy="1920240"/>
+          </a:xfrm>
+          <a:prstGeom prst="rect">
+            <a:avLst/>
+          </a:prstGeom>
+          <a:noFill/>
+        </p:spPr>
+        <p:txBody>
+          <a:bodyPr wrap="none">
+            <a:spAutoFit/>
+          </a:bodyPr>
+          <a:lstStyle/>
+          <a:p>
+            <a:pPr>
+              <a:defRPr sz="2800" b="1">
+                <a:solidFill>
+                  <a:srgbClr val="008D96"/>
+                </a:solidFill>
+              </a:defRPr>
+            </a:pPr>
+            <a:r>
+              <a:t>está en cómo conectamos campo, datos, software e IA para tomar mejores decisiones.</a:t>
+            </a:r>
+          </a:p>
+        </p:txBody>
+      </p:sp>
+      <p:pic>
+        <p:nvPicPr>
+          <p:cNvPr id="6" name="Picture 5" descr="opening.png"/>
+          <p:cNvPicPr>
+            <a:picLocks noChangeAspect="1"/>
+          </p:cNvPicPr>
+          <p:nvPr/>
+        </p:nvPicPr>
+        <p:blipFill>
+          <a:blip r:embed="rId2"/>
+          <a:stretch>
+            <a:fillRect/>
+          </a:stretch>
+        </p:blipFill>
+        <p:spPr>
+          <a:xfrm>
+            <a:off x="7132320" y="1463040"/>
+            <a:ext cx="4114800" cy="4389120"/>
+          </a:xfrm>
+          <a:prstGeom prst="rect">
+            <a:avLst/>
+          </a:prstGeom>
+        </p:spPr>
+      </p:pic>
+      <p:sp>
+        <p:nvSpPr>
+          <p:cNvPr id="7" name="Rectangle 6"/>
           <p:cNvSpPr/>
           <p:nvPr/>
         </p:nvSpPr>
         <p:spPr>
           <a:xfrm>
-            <a:off x="0" y="0"/>
-            <a:ext cx="12191695" cy="6858000"/>
+            <a:off x="594360" y="6446520"/>
+            <a:ext cx="11018520" cy="18288"/>
           </a:xfrm>
           <a:prstGeom prst="rect">
             <a:avLst/>
           </a:prstGeom>
           <a:solidFill>
-            <a:srgbClr val="132334"/>
+            <a:srgbClr val="008D96"/>
           </a:solidFill>
           <a:ln>
             <a:noFill/>
@@ -4547,14 +4719,110 @@
       </p:sp>
       <p:sp>
         <p:nvSpPr>
+          <p:cNvPr id="8" name="TextBox 7"/>
+          <p:cNvSpPr txBox="1"/>
+          <p:nvPr/>
+        </p:nvSpPr>
+        <p:spPr>
+          <a:xfrm>
+            <a:off x="10698480" y="6492240"/>
+            <a:ext cx="731520" cy="274320"/>
+          </a:xfrm>
+          <a:prstGeom prst="rect">
+            <a:avLst/>
+          </a:prstGeom>
+          <a:noFill/>
+        </p:spPr>
+        <p:txBody>
+          <a:bodyPr wrap="none">
+            <a:spAutoFit/>
+          </a:bodyPr>
+          <a:lstStyle/>
+          <a:p>
+            <a:pPr algn="r">
+              <a:defRPr sz="900">
+                <a:solidFill>
+                  <a:srgbClr val="FFFFFF"/>
+                </a:solidFill>
+              </a:defRPr>
+            </a:pPr>
+            <a:r>
+              <a:t>01</a:t>
+            </a:r>
+          </a:p>
+        </p:txBody>
+      </p:sp>
+    </p:spTree>
+  </p:cSld>
+  <p:clrMapOvr>
+    <a:masterClrMapping/>
+  </p:clrMapOvr>
+</p:sld>
+</file>
+
+<file path=ppt/slides/slide10.xml><?xml version="1.0" encoding="utf-8"?>
+<p:sld xmlns:a="http://schemas.openxmlformats.org/drawingml/2006/main" xmlns:p="http://schemas.openxmlformats.org/presentationml/2006/main" xmlns:r="http://schemas.openxmlformats.org/officeDocument/2006/relationships">
+  <p:cSld>
+    <p:bg>
+      <p:bgPr>
+        <a:solidFill>
+          <a:srgbClr val="F6F8FA"/>
+        </a:solidFill>
+        <a:effectLst/>
+      </p:bgPr>
+    </p:bg>
+    <p:spTree>
+      <p:nvGrpSpPr>
+        <p:cNvPr id="1" name=""/>
+        <p:cNvGrpSpPr/>
+        <p:nvPr/>
+      </p:nvGrpSpPr>
+      <p:grpSpPr/>
+      <p:sp>
+        <p:nvSpPr>
+          <p:cNvPr id="2" name="TextBox 1"/>
+          <p:cNvSpPr txBox="1"/>
+          <p:nvPr/>
+        </p:nvSpPr>
+        <p:spPr>
+          <a:xfrm>
+            <a:off x="594360" y="347472"/>
+            <a:ext cx="7680960" cy="1097280"/>
+          </a:xfrm>
+          <a:prstGeom prst="rect">
+            <a:avLst/>
+          </a:prstGeom>
+          <a:noFill/>
+        </p:spPr>
+        <p:txBody>
+          <a:bodyPr wrap="none">
+            <a:spAutoFit/>
+          </a:bodyPr>
+          <a:lstStyle/>
+          <a:p>
+            <a:pPr>
+              <a:defRPr sz="3000" b="1">
+                <a:solidFill>
+                  <a:srgbClr val="132334"/>
+                </a:solidFill>
+              </a:defRPr>
+            </a:pPr>
+            <a:r>
+              <a:t>Qué revela la capa de datos</a:t>
+            </a:r>
+          </a:p>
+        </p:txBody>
+      </p:sp>
+      <p:sp>
+        <p:nvSpPr>
           <p:cNvPr id="3" name="TextBox 2"/>
           <p:cNvSpPr txBox="1"/>
           <p:nvPr/>
         </p:nvSpPr>
         <p:spPr>
           <a:xfrm>
-            <a:off x="594360" y="347472"/>
-            <a:ext cx="7680960" cy="1097280"/>
+            <a:off x="621792" y="987552"/>
+            <a:ext cx="7772400" cy="731520"/>
           </a:xfrm>
           <a:prstGeom prst="rect">
             <a:avLst/>
@@ -4568,14 +4836,14 @@
           <a:lstStyle/>
           <a:p>
             <a:pPr>
-              <a:defRPr sz="3000" b="1">
-                <a:solidFill>
-                  <a:srgbClr val="FFFFFF"/>
-                </a:solidFill>
-              </a:defRPr>
-            </a:pPr>
-            <a:r>
-              <a:t>Más allá de la maquinaria</a:t>
+              <a:defRPr sz="1400">
+                <a:solidFill>
+                  <a:srgbClr val="606C79"/>
+                </a:solidFill>
+              </a:defRPr>
+            </a:pPr>
+            <a:r>
+              <a:t>Cruce de productividad, clima y secuencia crítica</a:t>
             </a:r>
           </a:p>
         </p:txBody>
@@ -4588,8 +4856,8 @@
         </p:nvSpPr>
         <p:spPr>
           <a:xfrm>
-            <a:off x="621792" y="987552"/>
-            <a:ext cx="7772400" cy="731520"/>
+            <a:off x="713232" y="1600200"/>
+            <a:ext cx="6629400" cy="4480560"/>
           </a:xfrm>
           <a:prstGeom prst="rect">
             <a:avLst/>
@@ -4603,91 +4871,84 @@
           <a:lstStyle/>
           <a:p>
             <a:pPr>
-              <a:defRPr sz="1400">
-                <a:solidFill>
-                  <a:srgbClr val="FFFFFF"/>
-                </a:solidFill>
-              </a:defRPr>
-            </a:pPr>
-            <a:r>
-              <a:t>EXPOMAQSER 2026 | Guayaquil | Estudiantes + sector constructor e inmobiliario</a:t>
-            </a:r>
-          </a:p>
-        </p:txBody>
-      </p:sp>
-      <p:sp>
-        <p:nvSpPr>
-          <p:cNvPr id="5" name="TextBox 4"/>
-          <p:cNvSpPr txBox="1"/>
-          <p:nvPr/>
-        </p:nvSpPr>
-        <p:spPr>
-          <a:xfrm>
-            <a:off x="731520" y="1965960"/>
-            <a:ext cx="6217920" cy="1097280"/>
-          </a:xfrm>
-          <a:prstGeom prst="rect">
-            <a:avLst/>
-          </a:prstGeom>
-          <a:noFill/>
-        </p:spPr>
-        <p:txBody>
-          <a:bodyPr wrap="none">
-            <a:spAutoFit/>
-          </a:bodyPr>
-          <a:lstStyle/>
+              <a:spcAft>
+                <a:spcPts val="1200"/>
+              </a:spcAft>
+              <a:defRPr sz="2100">
+                <a:solidFill>
+                  <a:srgbClr val="242C36"/>
+                </a:solidFill>
+              </a:defRPr>
+            </a:pPr>
+            <a:r>
+              <a:t>• Frente de estructura con productividad -11% por interferencias logísticas.</a:t>
+            </a:r>
+          </a:p>
           <a:p>
             <a:pPr>
-              <a:defRPr sz="2300" b="1">
-                <a:solidFill>
-                  <a:srgbClr val="FFFFFF"/>
-                </a:solidFill>
-              </a:defRPr>
-            </a:pPr>
-            <a:r>
-              <a:t>La ventaja competitiva en 2026 no está solo en equipos:</a:t>
-            </a:r>
-          </a:p>
-        </p:txBody>
-      </p:sp>
-      <p:sp>
-        <p:nvSpPr>
-          <p:cNvPr id="6" name="TextBox 5"/>
-          <p:cNvSpPr txBox="1"/>
-          <p:nvPr/>
-        </p:nvSpPr>
-        <p:spPr>
-          <a:xfrm>
-            <a:off x="731520" y="2971800"/>
-            <a:ext cx="6309360" cy="1920240"/>
-          </a:xfrm>
-          <a:prstGeom prst="rect">
-            <a:avLst/>
-          </a:prstGeom>
-          <a:noFill/>
-        </p:spPr>
-        <p:txBody>
-          <a:bodyPr wrap="none">
-            <a:spAutoFit/>
-          </a:bodyPr>
-          <a:lstStyle/>
+              <a:spcAft>
+                <a:spcPts val="1200"/>
+              </a:spcAft>
+              <a:defRPr sz="1900">
+                <a:solidFill>
+                  <a:srgbClr val="242C36"/>
+                </a:solidFill>
+              </a:defRPr>
+            </a:pPr>
+            <a:r>
+              <a:t>• Disponibilidad de bomba de hormigón cayó a 78% durante 3 semanas.</a:t>
+            </a:r>
+          </a:p>
           <a:p>
             <a:pPr>
-              <a:defRPr sz="2800" b="1">
-                <a:solidFill>
-                  <a:srgbClr val="008D96"/>
-                </a:solidFill>
-              </a:defRPr>
-            </a:pPr>
-            <a:r>
-              <a:t>está en cómo conectamos campo, datos, software e IA para tomar mejores decisiones.</a:t>
+              <a:spcAft>
+                <a:spcPts val="1200"/>
+              </a:spcAft>
+              <a:defRPr sz="1900">
+                <a:solidFill>
+                  <a:srgbClr val="242C36"/>
+                </a:solidFill>
+              </a:defRPr>
+            </a:pPr>
+            <a:r>
+              <a:t>• Compras de acero con variabilidad de entrega (+5 días promedio).</a:t>
+            </a:r>
+          </a:p>
+          <a:p>
+            <a:pPr>
+              <a:spcAft>
+                <a:spcPts val="1200"/>
+              </a:spcAft>
+              <a:defRPr sz="1900">
+                <a:solidFill>
+                  <a:srgbClr val="242C36"/>
+                </a:solidFill>
+              </a:defRPr>
+            </a:pPr>
+            <a:r>
+              <a:t>• Retrabajos en losas por coordinación tardía de instalaciones.</a:t>
+            </a:r>
+          </a:p>
+          <a:p>
+            <a:pPr>
+              <a:spcAft>
+                <a:spcPts val="1200"/>
+              </a:spcAft>
+              <a:defRPr sz="1900">
+                <a:solidFill>
+                  <a:srgbClr val="242C36"/>
+                </a:solidFill>
+              </a:defRPr>
+            </a:pPr>
+            <a:r>
+              <a:t>• Conclusión: el retraso no es una causa única, sino un patrón sistémico.</a:t>
             </a:r>
           </a:p>
         </p:txBody>
       </p:sp>
       <p:pic>
         <p:nvPicPr>
-          <p:cNvPr id="7" name="Picture 6" descr="opening.png"/>
+          <p:cNvPr id="5" name="Picture 4" descr="stack.png"/>
           <p:cNvPicPr>
             <a:picLocks noChangeAspect="1"/>
           </p:cNvPicPr>
@@ -4701,8 +4962,8 @@
         </p:blipFill>
         <p:spPr>
           <a:xfrm>
-            <a:off x="7132320" y="1463040"/>
-            <a:ext cx="4114800" cy="4389120"/>
+            <a:off x="7543800" y="1325880"/>
+            <a:ext cx="4160520" cy="4800600"/>
           </a:xfrm>
           <a:prstGeom prst="rect">
             <a:avLst/>
@@ -4711,7 +4972,7 @@
       </p:pic>
       <p:sp>
         <p:nvSpPr>
-          <p:cNvPr id="8" name="Rectangle 7"/>
+          <p:cNvPr id="6" name="Rectangle 5"/>
           <p:cNvSpPr/>
           <p:nvPr/>
         </p:nvSpPr>
@@ -4754,7 +5015,7 @@
       </p:sp>
       <p:sp>
         <p:nvSpPr>
-          <p:cNvPr id="9" name="TextBox 8"/>
+          <p:cNvPr id="7" name="TextBox 6"/>
           <p:cNvSpPr txBox="1"/>
           <p:nvPr/>
         </p:nvSpPr>
@@ -4777,12 +5038,12 @@
             <a:pPr algn="r">
               <a:defRPr sz="900">
                 <a:solidFill>
-                  <a:srgbClr val="FFFFFF"/>
-                </a:solidFill>
-              </a:defRPr>
-            </a:pPr>
-            <a:r>
-              <a:t>01</a:t>
+                  <a:srgbClr val="606C79"/>
+                </a:solidFill>
+              </a:defRPr>
+            </a:pPr>
+            <a:r>
+              <a:t>10</a:t>
             </a:r>
           </a:p>
         </p:txBody>
@@ -4795,9 +5056,17 @@
 </p:sld>
 </file>
 
-<file path=ppt/slides/slide10.xml><?xml version="1.0" encoding="utf-8"?>
+<file path=ppt/slides/slide11.xml><?xml version="1.0" encoding="utf-8"?>
 <p:sld xmlns:a="http://schemas.openxmlformats.org/drawingml/2006/main" xmlns:p="http://schemas.openxmlformats.org/presentationml/2006/main" xmlns:r="http://schemas.openxmlformats.org/officeDocument/2006/relationships">
   <p:cSld>
+    <p:bg>
+      <p:bgPr>
+        <a:solidFill>
+          <a:srgbClr val="F6F8FA"/>
+        </a:solidFill>
+        <a:effectLst/>
+      </p:bgPr>
+    </p:bg>
     <p:spTree>
       <p:nvGrpSpPr>
         <p:cNvPr id="1" name=""/>
@@ -4807,20 +5076,212 @@
       <p:grpSpPr/>
       <p:sp>
         <p:nvSpPr>
-          <p:cNvPr id="2" name="Rectangle 1"/>
+          <p:cNvPr id="2" name="TextBox 1"/>
+          <p:cNvSpPr txBox="1"/>
+          <p:nvPr/>
+        </p:nvSpPr>
+        <p:spPr>
+          <a:xfrm>
+            <a:off x="594360" y="347472"/>
+            <a:ext cx="7680960" cy="1097280"/>
+          </a:xfrm>
+          <a:prstGeom prst="rect">
+            <a:avLst/>
+          </a:prstGeom>
+          <a:noFill/>
+        </p:spPr>
+        <p:txBody>
+          <a:bodyPr wrap="none">
+            <a:spAutoFit/>
+          </a:bodyPr>
+          <a:lstStyle/>
+          <a:p>
+            <a:pPr>
+              <a:defRPr sz="3000" b="1">
+                <a:solidFill>
+                  <a:srgbClr val="132334"/>
+                </a:solidFill>
+              </a:defRPr>
+            </a:pPr>
+            <a:r>
+              <a:t>IA predictiva: alerta temprana accionable</a:t>
+            </a:r>
+          </a:p>
+        </p:txBody>
+      </p:sp>
+      <p:sp>
+        <p:nvSpPr>
+          <p:cNvPr id="3" name="TextBox 2"/>
+          <p:cNvSpPr txBox="1"/>
+          <p:nvPr/>
+        </p:nvSpPr>
+        <p:spPr>
+          <a:xfrm>
+            <a:off x="621792" y="987552"/>
+            <a:ext cx="7772400" cy="731520"/>
+          </a:xfrm>
+          <a:prstGeom prst="rect">
+            <a:avLst/>
+          </a:prstGeom>
+          <a:noFill/>
+        </p:spPr>
+        <p:txBody>
+          <a:bodyPr wrap="none">
+            <a:spAutoFit/>
+          </a:bodyPr>
+          <a:lstStyle/>
+          <a:p>
+            <a:pPr>
+              <a:defRPr sz="1400">
+                <a:solidFill>
+                  <a:srgbClr val="606C79"/>
+                </a:solidFill>
+              </a:defRPr>
+            </a:pPr>
+            <a:r>
+              <a:t>Modelo estima probabilidad de incumplir hito de semana 30</a:t>
+            </a:r>
+          </a:p>
+        </p:txBody>
+      </p:sp>
+      <p:sp>
+        <p:nvSpPr>
+          <p:cNvPr id="4" name="TextBox 3"/>
+          <p:cNvSpPr txBox="1"/>
+          <p:nvPr/>
+        </p:nvSpPr>
+        <p:spPr>
+          <a:xfrm>
+            <a:off x="713232" y="1600200"/>
+            <a:ext cx="6629400" cy="4480560"/>
+          </a:xfrm>
+          <a:prstGeom prst="rect">
+            <a:avLst/>
+          </a:prstGeom>
+          <a:noFill/>
+        </p:spPr>
+        <p:txBody>
+          <a:bodyPr wrap="none">
+            <a:spAutoFit/>
+          </a:bodyPr>
+          <a:lstStyle/>
+          <a:p>
+            <a:pPr>
+              <a:spcAft>
+                <a:spcPts val="1200"/>
+              </a:spcAft>
+              <a:defRPr sz="2100">
+                <a:solidFill>
+                  <a:srgbClr val="242C36"/>
+                </a:solidFill>
+              </a:defRPr>
+            </a:pPr>
+            <a:r>
+              <a:t>• Riesgo estimado de atraso del hito: 76% (señal alta).</a:t>
+            </a:r>
+          </a:p>
+          <a:p>
+            <a:pPr>
+              <a:spcAft>
+                <a:spcPts val="1200"/>
+              </a:spcAft>
+              <a:defRPr sz="1900">
+                <a:solidFill>
+                  <a:srgbClr val="242C36"/>
+                </a:solidFill>
+              </a:defRPr>
+            </a:pPr>
+            <a:r>
+              <a:t>• Factores explicativos: productividad, disponibilidad de equipo y secuencia crítica.</a:t>
+            </a:r>
+          </a:p>
+          <a:p>
+            <a:pPr>
+              <a:spcAft>
+                <a:spcPts val="1200"/>
+              </a:spcAft>
+              <a:defRPr sz="1900">
+                <a:solidFill>
+                  <a:srgbClr val="242C36"/>
+                </a:solidFill>
+              </a:defRPr>
+            </a:pPr>
+            <a:r>
+              <a:t>• Ventana de intervención: próximas 2 semanas.</a:t>
+            </a:r>
+          </a:p>
+          <a:p>
+            <a:pPr>
+              <a:spcAft>
+                <a:spcPts val="1200"/>
+              </a:spcAft>
+              <a:defRPr sz="1900">
+                <a:solidFill>
+                  <a:srgbClr val="242C36"/>
+                </a:solidFill>
+              </a:defRPr>
+            </a:pPr>
+            <a:r>
+              <a:t>• Escenario recomendado: reforzar cuadrilla + reprogramar vaciados nocturnos.</a:t>
+            </a:r>
+          </a:p>
+          <a:p>
+            <a:pPr>
+              <a:spcAft>
+                <a:spcPts val="1200"/>
+              </a:spcAft>
+              <a:defRPr sz="1900">
+                <a:solidFill>
+                  <a:srgbClr val="242C36"/>
+                </a:solidFill>
+              </a:defRPr>
+            </a:pPr>
+            <a:r>
+              <a:t>• Impacto esperado: recuperar 4 a 6 puntos de avance en 6 semanas.</a:t>
+            </a:r>
+          </a:p>
+        </p:txBody>
+      </p:sp>
+      <p:pic>
+        <p:nvPicPr>
+          <p:cNvPr id="5" name="Picture 4" descr="close.png"/>
+          <p:cNvPicPr>
+            <a:picLocks noChangeAspect="1"/>
+          </p:cNvPicPr>
+          <p:nvPr/>
+        </p:nvPicPr>
+        <p:blipFill>
+          <a:blip r:embed="rId2"/>
+          <a:stretch>
+            <a:fillRect/>
+          </a:stretch>
+        </p:blipFill>
+        <p:spPr>
+          <a:xfrm>
+            <a:off x="7543800" y="1325880"/>
+            <a:ext cx="4160520" cy="4800600"/>
+          </a:xfrm>
+          <a:prstGeom prst="rect">
+            <a:avLst/>
+          </a:prstGeom>
+        </p:spPr>
+      </p:pic>
+      <p:sp>
+        <p:nvSpPr>
+          <p:cNvPr id="6" name="Rectangle 5"/>
           <p:cNvSpPr/>
           <p:nvPr/>
         </p:nvSpPr>
         <p:spPr>
           <a:xfrm>
-            <a:off x="0" y="0"/>
-            <a:ext cx="12191695" cy="6858000"/>
+            <a:off x="594360" y="6446520"/>
+            <a:ext cx="11018520" cy="18288"/>
           </a:xfrm>
           <a:prstGeom prst="rect">
             <a:avLst/>
           </a:prstGeom>
           <a:solidFill>
-            <a:srgbClr val="F6F8FA"/>
+            <a:srgbClr val="008D96"/>
           </a:solidFill>
           <a:ln>
             <a:noFill/>
@@ -4850,14 +5311,110 @@
       </p:sp>
       <p:sp>
         <p:nvSpPr>
+          <p:cNvPr id="7" name="TextBox 6"/>
+          <p:cNvSpPr txBox="1"/>
+          <p:nvPr/>
+        </p:nvSpPr>
+        <p:spPr>
+          <a:xfrm>
+            <a:off x="10698480" y="6492240"/>
+            <a:ext cx="731520" cy="274320"/>
+          </a:xfrm>
+          <a:prstGeom prst="rect">
+            <a:avLst/>
+          </a:prstGeom>
+          <a:noFill/>
+        </p:spPr>
+        <p:txBody>
+          <a:bodyPr wrap="none">
+            <a:spAutoFit/>
+          </a:bodyPr>
+          <a:lstStyle/>
+          <a:p>
+            <a:pPr algn="r">
+              <a:defRPr sz="900">
+                <a:solidFill>
+                  <a:srgbClr val="606C79"/>
+                </a:solidFill>
+              </a:defRPr>
+            </a:pPr>
+            <a:r>
+              <a:t>11</a:t>
+            </a:r>
+          </a:p>
+        </p:txBody>
+      </p:sp>
+    </p:spTree>
+  </p:cSld>
+  <p:clrMapOvr>
+    <a:masterClrMapping/>
+  </p:clrMapOvr>
+</p:sld>
+</file>
+
+<file path=ppt/slides/slide12.xml><?xml version="1.0" encoding="utf-8"?>
+<p:sld xmlns:a="http://schemas.openxmlformats.org/drawingml/2006/main" xmlns:p="http://schemas.openxmlformats.org/presentationml/2006/main" xmlns:r="http://schemas.openxmlformats.org/officeDocument/2006/relationships">
+  <p:cSld>
+    <p:bg>
+      <p:bgPr>
+        <a:solidFill>
+          <a:srgbClr val="F6F8FA"/>
+        </a:solidFill>
+        <a:effectLst/>
+      </p:bgPr>
+    </p:bg>
+    <p:spTree>
+      <p:nvGrpSpPr>
+        <p:cNvPr id="1" name=""/>
+        <p:cNvGrpSpPr/>
+        <p:nvPr/>
+      </p:nvGrpSpPr>
+      <p:grpSpPr/>
+      <p:sp>
+        <p:nvSpPr>
+          <p:cNvPr id="2" name="TextBox 1"/>
+          <p:cNvSpPr txBox="1"/>
+          <p:nvPr/>
+        </p:nvSpPr>
+        <p:spPr>
+          <a:xfrm>
+            <a:off x="594360" y="347472"/>
+            <a:ext cx="7680960" cy="1097280"/>
+          </a:xfrm>
+          <a:prstGeom prst="rect">
+            <a:avLst/>
+          </a:prstGeom>
+          <a:noFill/>
+        </p:spPr>
+        <p:txBody>
+          <a:bodyPr wrap="none">
+            <a:spAutoFit/>
+          </a:bodyPr>
+          <a:lstStyle/>
+          <a:p>
+            <a:pPr>
+              <a:defRPr sz="3000" b="1">
+                <a:solidFill>
+                  <a:srgbClr val="132334"/>
+                </a:solidFill>
+              </a:defRPr>
+            </a:pPr>
+            <a:r>
+              <a:t>Computer Vision en operación</a:t>
+            </a:r>
+          </a:p>
+        </p:txBody>
+      </p:sp>
+      <p:sp>
+        <p:nvSpPr>
           <p:cNvPr id="3" name="TextBox 2"/>
           <p:cNvSpPr txBox="1"/>
           <p:nvPr/>
         </p:nvSpPr>
         <p:spPr>
           <a:xfrm>
-            <a:off x="594360" y="347472"/>
-            <a:ext cx="7680960" cy="1097280"/>
+            <a:off x="621792" y="987552"/>
+            <a:ext cx="7772400" cy="731520"/>
           </a:xfrm>
           <a:prstGeom prst="rect">
             <a:avLst/>
@@ -4871,14 +5428,14 @@
           <a:lstStyle/>
           <a:p>
             <a:pPr>
-              <a:defRPr sz="3000" b="1">
-                <a:solidFill>
-                  <a:srgbClr val="132334"/>
-                </a:solidFill>
-              </a:defRPr>
-            </a:pPr>
-            <a:r>
-              <a:t>Qué revela la capa de datos</a:t>
+              <a:defRPr sz="1400">
+                <a:solidFill>
+                  <a:srgbClr val="606C79"/>
+                </a:solidFill>
+              </a:defRPr>
+            </a:pPr>
+            <a:r>
+              <a:t>Del video de obra a alertas de seguridad y progreso</a:t>
             </a:r>
           </a:p>
         </p:txBody>
@@ -4886,41 +5443,6 @@
       <p:sp>
         <p:nvSpPr>
           <p:cNvPr id="4" name="TextBox 3"/>
-          <p:cNvSpPr txBox="1"/>
-          <p:nvPr/>
-        </p:nvSpPr>
-        <p:spPr>
-          <a:xfrm>
-            <a:off x="621792" y="987552"/>
-            <a:ext cx="7772400" cy="731520"/>
-          </a:xfrm>
-          <a:prstGeom prst="rect">
-            <a:avLst/>
-          </a:prstGeom>
-          <a:noFill/>
-        </p:spPr>
-        <p:txBody>
-          <a:bodyPr wrap="none">
-            <a:spAutoFit/>
-          </a:bodyPr>
-          <a:lstStyle/>
-          <a:p>
-            <a:pPr>
-              <a:defRPr sz="1400">
-                <a:solidFill>
-                  <a:srgbClr val="606C79"/>
-                </a:solidFill>
-              </a:defRPr>
-            </a:pPr>
-            <a:r>
-              <a:t>Cruce de productividad, clima y secuencia crítica</a:t>
-            </a:r>
-          </a:p>
-        </p:txBody>
-      </p:sp>
-      <p:sp>
-        <p:nvSpPr>
-          <p:cNvPr id="5" name="TextBox 4"/>
           <p:cNvSpPr txBox="1"/>
           <p:nvPr/>
         </p:nvSpPr>
@@ -4951,7 +5473,7 @@
               </a:defRPr>
             </a:pPr>
             <a:r>
-              <a:t>• Frente de estructura con productividad -11% por interferencias logísticas.</a:t>
+              <a:t>• Detección de uso de EPP en zonas definidas de riesgo.</a:t>
             </a:r>
           </a:p>
           <a:p>
@@ -4966,7 +5488,7 @@
               </a:defRPr>
             </a:pPr>
             <a:r>
-              <a:t>• Disponibilidad de bomba de hormigón cayó a 78% durante 3 semanas.</a:t>
+              <a:t>• Conteo de avance visual por elemento construido vs. BIM.</a:t>
             </a:r>
           </a:p>
           <a:p>
@@ -4981,7 +5503,7 @@
               </a:defRPr>
             </a:pPr>
             <a:r>
-              <a:t>• Compras de acero con variabilidad de entrega (+5 días promedio).</a:t>
+              <a:t>• Identificación de zonas congestionadas para optimizar logística.</a:t>
             </a:r>
           </a:p>
           <a:p>
@@ -4996,7 +5518,7 @@
               </a:defRPr>
             </a:pPr>
             <a:r>
-              <a:t>• Retrabajos en losas por coordinación tardía de instalaciones.</a:t>
+              <a:t>• Reporte automático diario para jefatura de obra y HSE.</a:t>
             </a:r>
           </a:p>
           <a:p>
@@ -5011,14 +5533,14 @@
               </a:defRPr>
             </a:pPr>
             <a:r>
-              <a:t>• Conclusión: el retraso no es una causa única, sino un patrón sistémico.</a:t>
+              <a:t>• Beneficio: supervisión más consistente sin depender solo del recorrido manual.</a:t>
             </a:r>
           </a:p>
         </p:txBody>
       </p:sp>
       <p:pic>
         <p:nvPicPr>
-          <p:cNvPr id="6" name="Picture 5" descr="stack.png"/>
+          <p:cNvPr id="5" name="Picture 4" descr="cv.png"/>
           <p:cNvPicPr>
             <a:picLocks noChangeAspect="1"/>
           </p:cNvPicPr>
@@ -5042,7 +5564,7 @@
       </p:pic>
       <p:sp>
         <p:nvSpPr>
-          <p:cNvPr id="7" name="Rectangle 6"/>
+          <p:cNvPr id="6" name="Rectangle 5"/>
           <p:cNvSpPr/>
           <p:nvPr/>
         </p:nvSpPr>
@@ -5085,7 +5607,7 @@
       </p:sp>
       <p:sp>
         <p:nvSpPr>
-          <p:cNvPr id="8" name="TextBox 7"/>
+          <p:cNvPr id="7" name="TextBox 6"/>
           <p:cNvSpPr txBox="1"/>
           <p:nvPr/>
         </p:nvSpPr>
@@ -5113,7 +5635,7 @@
               </a:defRPr>
             </a:pPr>
             <a:r>
-              <a:t>10</a:t>
+              <a:t>12</a:t>
             </a:r>
           </a:p>
         </p:txBody>
@@ -5126,9 +5648,17 @@
 </p:sld>
 </file>
 
-<file path=ppt/slides/slide11.xml><?xml version="1.0" encoding="utf-8"?>
+<file path=ppt/slides/slide13.xml><?xml version="1.0" encoding="utf-8"?>
 <p:sld xmlns:a="http://schemas.openxmlformats.org/drawingml/2006/main" xmlns:p="http://schemas.openxmlformats.org/presentationml/2006/main" xmlns:r="http://schemas.openxmlformats.org/officeDocument/2006/relationships">
   <p:cSld>
+    <p:bg>
+      <p:bgPr>
+        <a:solidFill>
+          <a:srgbClr val="F6F8FA"/>
+        </a:solidFill>
+        <a:effectLst/>
+      </p:bgPr>
+    </p:bg>
     <p:spTree>
       <p:nvGrpSpPr>
         <p:cNvPr id="1" name=""/>
@@ -5138,20 +5668,212 @@
       <p:grpSpPr/>
       <p:sp>
         <p:nvSpPr>
-          <p:cNvPr id="2" name="Rectangle 1"/>
+          <p:cNvPr id="2" name="TextBox 1"/>
+          <p:cNvSpPr txBox="1"/>
+          <p:nvPr/>
+        </p:nvSpPr>
+        <p:spPr>
+          <a:xfrm>
+            <a:off x="594360" y="347472"/>
+            <a:ext cx="7680960" cy="1097280"/>
+          </a:xfrm>
+          <a:prstGeom prst="rect">
+            <a:avLst/>
+          </a:prstGeom>
+          <a:noFill/>
+        </p:spPr>
+        <p:txBody>
+          <a:bodyPr wrap="none">
+            <a:spAutoFit/>
+          </a:bodyPr>
+          <a:lstStyle/>
+          <a:p>
+            <a:pPr>
+              <a:defRPr sz="3000" b="1">
+                <a:solidFill>
+                  <a:srgbClr val="132334"/>
+                </a:solidFill>
+              </a:defRPr>
+            </a:pPr>
+            <a:r>
+              <a:t>Decisión integrada: comité semanal con evidencia</a:t>
+            </a:r>
+          </a:p>
+        </p:txBody>
+      </p:sp>
+      <p:sp>
+        <p:nvSpPr>
+          <p:cNvPr id="3" name="TextBox 2"/>
+          <p:cNvSpPr txBox="1"/>
+          <p:nvPr/>
+        </p:nvSpPr>
+        <p:spPr>
+          <a:xfrm>
+            <a:off x="621792" y="987552"/>
+            <a:ext cx="7772400" cy="731520"/>
+          </a:xfrm>
+          <a:prstGeom prst="rect">
+            <a:avLst/>
+          </a:prstGeom>
+          <a:noFill/>
+        </p:spPr>
+        <p:txBody>
+          <a:bodyPr wrap="none">
+            <a:spAutoFit/>
+          </a:bodyPr>
+          <a:lstStyle/>
+          <a:p>
+            <a:pPr>
+              <a:defRPr sz="1400">
+                <a:solidFill>
+                  <a:srgbClr val="606C79"/>
+                </a:solidFill>
+              </a:defRPr>
+            </a:pPr>
+            <a:r>
+              <a:t>Civil + Sistemas + Finanzas + Operaciones</a:t>
+            </a:r>
+          </a:p>
+        </p:txBody>
+      </p:sp>
+      <p:sp>
+        <p:nvSpPr>
+          <p:cNvPr id="4" name="TextBox 3"/>
+          <p:cNvSpPr txBox="1"/>
+          <p:nvPr/>
+        </p:nvSpPr>
+        <p:spPr>
+          <a:xfrm>
+            <a:off x="713232" y="1600200"/>
+            <a:ext cx="6629400" cy="4480560"/>
+          </a:xfrm>
+          <a:prstGeom prst="rect">
+            <a:avLst/>
+          </a:prstGeom>
+          <a:noFill/>
+        </p:spPr>
+        <p:txBody>
+          <a:bodyPr wrap="none">
+            <a:spAutoFit/>
+          </a:bodyPr>
+          <a:lstStyle/>
+          <a:p>
+            <a:pPr>
+              <a:spcAft>
+                <a:spcPts val="1200"/>
+              </a:spcAft>
+              <a:defRPr sz="2100">
+                <a:solidFill>
+                  <a:srgbClr val="242C36"/>
+                </a:solidFill>
+              </a:defRPr>
+            </a:pPr>
+            <a:r>
+              <a:t>• Dato común: una sola versión de cronograma, costo y avance.</a:t>
+            </a:r>
+          </a:p>
+          <a:p>
+            <a:pPr>
+              <a:spcAft>
+                <a:spcPts val="1200"/>
+              </a:spcAft>
+              <a:defRPr sz="1900">
+                <a:solidFill>
+                  <a:srgbClr val="242C36"/>
+                </a:solidFill>
+              </a:defRPr>
+            </a:pPr>
+            <a:r>
+              <a:t>• Priorización por impacto económico y riesgo contractual.</a:t>
+            </a:r>
+          </a:p>
+          <a:p>
+            <a:pPr>
+              <a:spcAft>
+                <a:spcPts val="1200"/>
+              </a:spcAft>
+              <a:defRPr sz="1900">
+                <a:solidFill>
+                  <a:srgbClr val="242C36"/>
+                </a:solidFill>
+              </a:defRPr>
+            </a:pPr>
+            <a:r>
+              <a:t>• Asignación clara de responsables y fechas de cierre.</a:t>
+            </a:r>
+          </a:p>
+          <a:p>
+            <a:pPr>
+              <a:spcAft>
+                <a:spcPts val="1200"/>
+              </a:spcAft>
+              <a:defRPr sz="1900">
+                <a:solidFill>
+                  <a:srgbClr val="242C36"/>
+                </a:solidFill>
+              </a:defRPr>
+            </a:pPr>
+            <a:r>
+              <a:t>• Seguimiento de cumplimiento con tablero ejecutivo.</a:t>
+            </a:r>
+          </a:p>
+          <a:p>
+            <a:pPr>
+              <a:spcAft>
+                <a:spcPts val="1200"/>
+              </a:spcAft>
+              <a:defRPr sz="1900">
+                <a:solidFill>
+                  <a:srgbClr val="242C36"/>
+                </a:solidFill>
+              </a:defRPr>
+            </a:pPr>
+            <a:r>
+              <a:t>• Resultado: menos discusión subjetiva, más ejecución coordinada.</a:t>
+            </a:r>
+          </a:p>
+        </p:txBody>
+      </p:sp>
+      <p:pic>
+        <p:nvPicPr>
+          <p:cNvPr id="5" name="Picture 4" descr="students.png"/>
+          <p:cNvPicPr>
+            <a:picLocks noChangeAspect="1"/>
+          </p:cNvPicPr>
+          <p:nvPr/>
+        </p:nvPicPr>
+        <p:blipFill>
+          <a:blip r:embed="rId2"/>
+          <a:stretch>
+            <a:fillRect/>
+          </a:stretch>
+        </p:blipFill>
+        <p:spPr>
+          <a:xfrm>
+            <a:off x="7543800" y="1325880"/>
+            <a:ext cx="4160520" cy="4800600"/>
+          </a:xfrm>
+          <a:prstGeom prst="rect">
+            <a:avLst/>
+          </a:prstGeom>
+        </p:spPr>
+      </p:pic>
+      <p:sp>
+        <p:nvSpPr>
+          <p:cNvPr id="6" name="Rectangle 5"/>
           <p:cNvSpPr/>
           <p:nvPr/>
         </p:nvSpPr>
         <p:spPr>
           <a:xfrm>
-            <a:off x="0" y="0"/>
-            <a:ext cx="12191695" cy="6858000"/>
+            <a:off x="594360" y="6446520"/>
+            <a:ext cx="11018520" cy="18288"/>
           </a:xfrm>
           <a:prstGeom prst="rect">
             <a:avLst/>
           </a:prstGeom>
           <a:solidFill>
-            <a:srgbClr val="F6F8FA"/>
+            <a:srgbClr val="008D96"/>
           </a:solidFill>
           <a:ln>
             <a:noFill/>
@@ -5181,14 +5903,110 @@
       </p:sp>
       <p:sp>
         <p:nvSpPr>
+          <p:cNvPr id="7" name="TextBox 6"/>
+          <p:cNvSpPr txBox="1"/>
+          <p:nvPr/>
+        </p:nvSpPr>
+        <p:spPr>
+          <a:xfrm>
+            <a:off x="10698480" y="6492240"/>
+            <a:ext cx="731520" cy="274320"/>
+          </a:xfrm>
+          <a:prstGeom prst="rect">
+            <a:avLst/>
+          </a:prstGeom>
+          <a:noFill/>
+        </p:spPr>
+        <p:txBody>
+          <a:bodyPr wrap="none">
+            <a:spAutoFit/>
+          </a:bodyPr>
+          <a:lstStyle/>
+          <a:p>
+            <a:pPr algn="r">
+              <a:defRPr sz="900">
+                <a:solidFill>
+                  <a:srgbClr val="606C79"/>
+                </a:solidFill>
+              </a:defRPr>
+            </a:pPr>
+            <a:r>
+              <a:t>13</a:t>
+            </a:r>
+          </a:p>
+        </p:txBody>
+      </p:sp>
+    </p:spTree>
+  </p:cSld>
+  <p:clrMapOvr>
+    <a:masterClrMapping/>
+  </p:clrMapOvr>
+</p:sld>
+</file>
+
+<file path=ppt/slides/slide14.xml><?xml version="1.0" encoding="utf-8"?>
+<p:sld xmlns:a="http://schemas.openxmlformats.org/drawingml/2006/main" xmlns:p="http://schemas.openxmlformats.org/presentationml/2006/main" xmlns:r="http://schemas.openxmlformats.org/officeDocument/2006/relationships">
+  <p:cSld>
+    <p:bg>
+      <p:bgPr>
+        <a:solidFill>
+          <a:srgbClr val="F6F8FA"/>
+        </a:solidFill>
+        <a:effectLst/>
+      </p:bgPr>
+    </p:bg>
+    <p:spTree>
+      <p:nvGrpSpPr>
+        <p:cNvPr id="1" name=""/>
+        <p:cNvGrpSpPr/>
+        <p:nvPr/>
+      </p:nvGrpSpPr>
+      <p:grpSpPr/>
+      <p:sp>
+        <p:nvSpPr>
+          <p:cNvPr id="2" name="TextBox 1"/>
+          <p:cNvSpPr txBox="1"/>
+          <p:nvPr/>
+        </p:nvSpPr>
+        <p:spPr>
+          <a:xfrm>
+            <a:off x="594360" y="347472"/>
+            <a:ext cx="7680960" cy="1097280"/>
+          </a:xfrm>
+          <a:prstGeom prst="rect">
+            <a:avLst/>
+          </a:prstGeom>
+          <a:noFill/>
+        </p:spPr>
+        <p:txBody>
+          <a:bodyPr wrap="none">
+            <a:spAutoFit/>
+          </a:bodyPr>
+          <a:lstStyle/>
+          <a:p>
+            <a:pPr>
+              <a:defRPr sz="3000" b="1">
+                <a:solidFill>
+                  <a:srgbClr val="132334"/>
+                </a:solidFill>
+              </a:defRPr>
+            </a:pPr>
+            <a:r>
+              <a:t>Plan de adopción en 90 días</a:t>
+            </a:r>
+          </a:p>
+        </p:txBody>
+      </p:sp>
+      <p:sp>
+        <p:nvSpPr>
           <p:cNvPr id="3" name="TextBox 2"/>
           <p:cNvSpPr txBox="1"/>
           <p:nvPr/>
         </p:nvSpPr>
         <p:spPr>
           <a:xfrm>
-            <a:off x="594360" y="347472"/>
-            <a:ext cx="7680960" cy="1097280"/>
+            <a:off x="621792" y="987552"/>
+            <a:ext cx="7772400" cy="731520"/>
           </a:xfrm>
           <a:prstGeom prst="rect">
             <a:avLst/>
@@ -5202,14 +6020,14 @@
           <a:lstStyle/>
           <a:p>
             <a:pPr>
-              <a:defRPr sz="3000" b="1">
-                <a:solidFill>
-                  <a:srgbClr val="132334"/>
-                </a:solidFill>
-              </a:defRPr>
-            </a:pPr>
-            <a:r>
-              <a:t>IA predictiva: alerta temprana accionable</a:t>
+              <a:defRPr sz="1400">
+                <a:solidFill>
+                  <a:srgbClr val="606C79"/>
+                </a:solidFill>
+              </a:defRPr>
+            </a:pPr>
+            <a:r>
+              <a:t>Piloto realista para empresa o alianza universidad-industria</a:t>
             </a:r>
           </a:p>
         </p:txBody>
@@ -5217,41 +6035,6 @@
       <p:sp>
         <p:nvSpPr>
           <p:cNvPr id="4" name="TextBox 3"/>
-          <p:cNvSpPr txBox="1"/>
-          <p:nvPr/>
-        </p:nvSpPr>
-        <p:spPr>
-          <a:xfrm>
-            <a:off x="621792" y="987552"/>
-            <a:ext cx="7772400" cy="731520"/>
-          </a:xfrm>
-          <a:prstGeom prst="rect">
-            <a:avLst/>
-          </a:prstGeom>
-          <a:noFill/>
-        </p:spPr>
-        <p:txBody>
-          <a:bodyPr wrap="none">
-            <a:spAutoFit/>
-          </a:bodyPr>
-          <a:lstStyle/>
-          <a:p>
-            <a:pPr>
-              <a:defRPr sz="1400">
-                <a:solidFill>
-                  <a:srgbClr val="606C79"/>
-                </a:solidFill>
-              </a:defRPr>
-            </a:pPr>
-            <a:r>
-              <a:t>Modelo estima probabilidad de incumplir hito de semana 30</a:t>
-            </a:r>
-          </a:p>
-        </p:txBody>
-      </p:sp>
-      <p:sp>
-        <p:nvSpPr>
-          <p:cNvPr id="5" name="TextBox 4"/>
           <p:cNvSpPr txBox="1"/>
           <p:nvPr/>
         </p:nvSpPr>
@@ -5282,7 +6065,7 @@
               </a:defRPr>
             </a:pPr>
             <a:r>
-              <a:t>• Riesgo estimado de atraso del hito: 76% (señal alta).</a:t>
+              <a:t>• Semana 1-2: definir caso prioritario (retraso, seguridad o productividad).</a:t>
             </a:r>
           </a:p>
           <a:p>
@@ -5297,7 +6080,7 @@
               </a:defRPr>
             </a:pPr>
             <a:r>
-              <a:t>• Factores explicativos: productividad, disponibilidad de equipo y secuencia crítica.</a:t>
+              <a:t>• Semana 3-5: conectar fuentes mínimas de datos y tablero operativo.</a:t>
             </a:r>
           </a:p>
           <a:p>
@@ -5312,7 +6095,7 @@
               </a:defRPr>
             </a:pPr>
             <a:r>
-              <a:t>• Ventana de intervención: próximas 2 semanas.</a:t>
+              <a:t>• Semana 6-8: correr modelo predictivo y validar con equipo de obra.</a:t>
             </a:r>
           </a:p>
           <a:p>
@@ -5327,7 +6110,7 @@
               </a:defRPr>
             </a:pPr>
             <a:r>
-              <a:t>• Escenario recomendado: reforzar cuadrilla + reprogramar vaciados nocturnos.</a:t>
+              <a:t>• Semana 9-12: medir ROI (tiempo, costo, incidentes, retrabajo).</a:t>
             </a:r>
           </a:p>
           <a:p>
@@ -5342,14 +6125,14 @@
               </a:defRPr>
             </a:pPr>
             <a:r>
-              <a:t>• Impacto esperado: recuperar 4 a 6 puntos de avance en 6 semanas.</a:t>
+              <a:t>• Escalamiento: estandarizar metodología para nuevos proyectos.</a:t>
             </a:r>
           </a:p>
         </p:txBody>
       </p:sp>
       <p:pic>
         <p:nvPicPr>
-          <p:cNvPr id="6" name="Picture 5" descr="close.png"/>
+          <p:cNvPr id="5" name="Picture 4" descr="close.png"/>
           <p:cNvPicPr>
             <a:picLocks noChangeAspect="1"/>
           </p:cNvPicPr>
@@ -5373,7 +6156,7 @@
       </p:pic>
       <p:sp>
         <p:nvSpPr>
-          <p:cNvPr id="7" name="Rectangle 6"/>
+          <p:cNvPr id="6" name="Rectangle 5"/>
           <p:cNvSpPr/>
           <p:nvPr/>
         </p:nvSpPr>
@@ -5416,7 +6199,7 @@
       </p:sp>
       <p:sp>
         <p:nvSpPr>
-          <p:cNvPr id="8" name="TextBox 7"/>
+          <p:cNvPr id="7" name="TextBox 6"/>
           <p:cNvSpPr txBox="1"/>
           <p:nvPr/>
         </p:nvSpPr>
@@ -5444,7 +6227,7 @@
               </a:defRPr>
             </a:pPr>
             <a:r>
-              <a:t>11</a:t>
+              <a:t>14</a:t>
             </a:r>
           </a:p>
         </p:txBody>
@@ -5457,9 +6240,17 @@
 </p:sld>
 </file>
 
-<file path=ppt/slides/slide12.xml><?xml version="1.0" encoding="utf-8"?>
+<file path=ppt/slides/slide15.xml><?xml version="1.0" encoding="utf-8"?>
 <p:sld xmlns:a="http://schemas.openxmlformats.org/drawingml/2006/main" xmlns:p="http://schemas.openxmlformats.org/presentationml/2006/main" xmlns:r="http://schemas.openxmlformats.org/officeDocument/2006/relationships">
   <p:cSld>
+    <p:bg>
+      <p:bgPr>
+        <a:solidFill>
+          <a:srgbClr val="132334"/>
+        </a:solidFill>
+        <a:effectLst/>
+      </p:bgPr>
+    </p:bg>
     <p:spTree>
       <p:nvGrpSpPr>
         <p:cNvPr id="1" name=""/>
@@ -5469,20 +6260,196 @@
       <p:grpSpPr/>
       <p:sp>
         <p:nvSpPr>
-          <p:cNvPr id="2" name="Rectangle 1"/>
+          <p:cNvPr id="2" name="TextBox 1"/>
+          <p:cNvSpPr txBox="1"/>
+          <p:nvPr/>
+        </p:nvSpPr>
+        <p:spPr>
+          <a:xfrm>
+            <a:off x="594360" y="347472"/>
+            <a:ext cx="7680960" cy="1097280"/>
+          </a:xfrm>
+          <a:prstGeom prst="rect">
+            <a:avLst/>
+          </a:prstGeom>
+          <a:noFill/>
+        </p:spPr>
+        <p:txBody>
+          <a:bodyPr wrap="none">
+            <a:spAutoFit/>
+          </a:bodyPr>
+          <a:lstStyle/>
+          <a:p>
+            <a:pPr>
+              <a:defRPr sz="3000" b="1">
+                <a:solidFill>
+                  <a:srgbClr val="FFFFFF"/>
+                </a:solidFill>
+              </a:defRPr>
+            </a:pPr>
+            <a:r>
+              <a:t>Cierre</a:t>
+            </a:r>
+          </a:p>
+        </p:txBody>
+      </p:sp>
+      <p:sp>
+        <p:nvSpPr>
+          <p:cNvPr id="3" name="TextBox 2"/>
+          <p:cNvSpPr txBox="1"/>
+          <p:nvPr/>
+        </p:nvSpPr>
+        <p:spPr>
+          <a:xfrm>
+            <a:off x="621792" y="987552"/>
+            <a:ext cx="7772400" cy="731520"/>
+          </a:xfrm>
+          <a:prstGeom prst="rect">
+            <a:avLst/>
+          </a:prstGeom>
+          <a:noFill/>
+        </p:spPr>
+        <p:txBody>
+          <a:bodyPr wrap="none">
+            <a:spAutoFit/>
+          </a:bodyPr>
+          <a:lstStyle/>
+          <a:p>
+            <a:pPr>
+              <a:defRPr sz="1400">
+                <a:solidFill>
+                  <a:srgbClr val="FFFFFF"/>
+                </a:solidFill>
+              </a:defRPr>
+            </a:pPr>
+            <a:r>
+              <a:t>La próxima ventaja competitiva en construcción ecuatoriana será técnico-digital</a:t>
+            </a:r>
+          </a:p>
+        </p:txBody>
+      </p:sp>
+      <p:sp>
+        <p:nvSpPr>
+          <p:cNvPr id="4" name="TextBox 3"/>
+          <p:cNvSpPr txBox="1"/>
+          <p:nvPr/>
+        </p:nvSpPr>
+        <p:spPr>
+          <a:xfrm>
+            <a:off x="731520" y="1828800"/>
+            <a:ext cx="6583680" cy="2377440"/>
+          </a:xfrm>
+          <a:prstGeom prst="rect">
+            <a:avLst/>
+          </a:prstGeom>
+          <a:noFill/>
+        </p:spPr>
+        <p:txBody>
+          <a:bodyPr wrap="none">
+            <a:spAutoFit/>
+          </a:bodyPr>
+          <a:lstStyle/>
+          <a:p>
+            <a:pPr>
+              <a:defRPr sz="3600" b="1">
+                <a:solidFill>
+                  <a:srgbClr val="FFFFFF"/>
+                </a:solidFill>
+              </a:defRPr>
+            </a:pPr>
+            <a:r>
+              <a:t>No se trata de tener más datos.</a:t>
+            </a:r>
+          </a:p>
+          <a:p>
+            <a:pPr>
+              <a:defRPr sz="3400" b="1">
+                <a:solidFill>
+                  <a:srgbClr val="008D96"/>
+                </a:solidFill>
+              </a:defRPr>
+            </a:pPr>
+            <a:r>
+              <a:t>Se trata de convertirlos en decisiones a tiempo.</a:t>
+            </a:r>
+          </a:p>
+        </p:txBody>
+      </p:sp>
+      <p:pic>
+        <p:nvPicPr>
+          <p:cNvPr id="5" name="Picture 4" descr="opening.png"/>
+          <p:cNvPicPr>
+            <a:picLocks noChangeAspect="1"/>
+          </p:cNvPicPr>
+          <p:nvPr/>
+        </p:nvPicPr>
+        <p:blipFill>
+          <a:blip r:embed="rId2"/>
+          <a:stretch>
+            <a:fillRect/>
+          </a:stretch>
+        </p:blipFill>
+        <p:spPr>
+          <a:xfrm>
+            <a:off x="7360920" y="1554480"/>
+            <a:ext cx="3840480" cy="4297680"/>
+          </a:xfrm>
+          <a:prstGeom prst="rect">
+            <a:avLst/>
+          </a:prstGeom>
+        </p:spPr>
+      </p:pic>
+      <p:sp>
+        <p:nvSpPr>
+          <p:cNvPr id="6" name="TextBox 5"/>
+          <p:cNvSpPr txBox="1"/>
+          <p:nvPr/>
+        </p:nvSpPr>
+        <p:spPr>
+          <a:xfrm>
+            <a:off x="731520" y="4800600"/>
+            <a:ext cx="6400800" cy="1280160"/>
+          </a:xfrm>
+          <a:prstGeom prst="rect">
+            <a:avLst/>
+          </a:prstGeom>
+          <a:noFill/>
+        </p:spPr>
+        <p:txBody>
+          <a:bodyPr wrap="none">
+            <a:spAutoFit/>
+          </a:bodyPr>
+          <a:lstStyle/>
+          <a:p>
+            <a:pPr>
+              <a:defRPr sz="2000">
+                <a:solidFill>
+                  <a:srgbClr val="FFFFFF"/>
+                </a:solidFill>
+              </a:defRPr>
+            </a:pPr>
+            <a:r>
+              <a:t>Siguiente: demo en vivo (10 min) + preguntas (5 min).</a:t>
+            </a:r>
+          </a:p>
+        </p:txBody>
+      </p:sp>
+      <p:sp>
+        <p:nvSpPr>
+          <p:cNvPr id="7" name="Rectangle 6"/>
           <p:cNvSpPr/>
           <p:nvPr/>
         </p:nvSpPr>
         <p:spPr>
           <a:xfrm>
-            <a:off x="0" y="0"/>
-            <a:ext cx="12191695" cy="6858000"/>
+            <a:off x="594360" y="6446520"/>
+            <a:ext cx="11018520" cy="18288"/>
           </a:xfrm>
           <a:prstGeom prst="rect">
             <a:avLst/>
           </a:prstGeom>
           <a:solidFill>
-            <a:srgbClr val="F6F8FA"/>
+            <a:srgbClr val="008D96"/>
           </a:solidFill>
           <a:ln>
             <a:noFill/>
@@ -5512,14 +6479,110 @@
       </p:sp>
       <p:sp>
         <p:nvSpPr>
+          <p:cNvPr id="8" name="TextBox 7"/>
+          <p:cNvSpPr txBox="1"/>
+          <p:nvPr/>
+        </p:nvSpPr>
+        <p:spPr>
+          <a:xfrm>
+            <a:off x="10698480" y="6492240"/>
+            <a:ext cx="731520" cy="274320"/>
+          </a:xfrm>
+          <a:prstGeom prst="rect">
+            <a:avLst/>
+          </a:prstGeom>
+          <a:noFill/>
+        </p:spPr>
+        <p:txBody>
+          <a:bodyPr wrap="none">
+            <a:spAutoFit/>
+          </a:bodyPr>
+          <a:lstStyle/>
+          <a:p>
+            <a:pPr algn="r">
+              <a:defRPr sz="900">
+                <a:solidFill>
+                  <a:srgbClr val="FFFFFF"/>
+                </a:solidFill>
+              </a:defRPr>
+            </a:pPr>
+            <a:r>
+              <a:t>15</a:t>
+            </a:r>
+          </a:p>
+        </p:txBody>
+      </p:sp>
+    </p:spTree>
+  </p:cSld>
+  <p:clrMapOvr>
+    <a:masterClrMapping/>
+  </p:clrMapOvr>
+</p:sld>
+</file>
+
+<file path=ppt/slides/slide2.xml><?xml version="1.0" encoding="utf-8"?>
+<p:sld xmlns:a="http://schemas.openxmlformats.org/drawingml/2006/main" xmlns:p="http://schemas.openxmlformats.org/presentationml/2006/main" xmlns:r="http://schemas.openxmlformats.org/officeDocument/2006/relationships">
+  <p:cSld>
+    <p:bg>
+      <p:bgPr>
+        <a:solidFill>
+          <a:srgbClr val="F6F8FA"/>
+        </a:solidFill>
+        <a:effectLst/>
+      </p:bgPr>
+    </p:bg>
+    <p:spTree>
+      <p:nvGrpSpPr>
+        <p:cNvPr id="1" name=""/>
+        <p:cNvGrpSpPr/>
+        <p:nvPr/>
+      </p:nvGrpSpPr>
+      <p:grpSpPr/>
+      <p:sp>
+        <p:nvSpPr>
+          <p:cNvPr id="2" name="TextBox 1"/>
+          <p:cNvSpPr txBox="1"/>
+          <p:nvPr/>
+        </p:nvSpPr>
+        <p:spPr>
+          <a:xfrm>
+            <a:off x="594360" y="347472"/>
+            <a:ext cx="7680960" cy="1097280"/>
+          </a:xfrm>
+          <a:prstGeom prst="rect">
+            <a:avLst/>
+          </a:prstGeom>
+          <a:noFill/>
+        </p:spPr>
+        <p:txBody>
+          <a:bodyPr wrap="none">
+            <a:spAutoFit/>
+          </a:bodyPr>
+          <a:lstStyle/>
+          <a:p>
+            <a:pPr>
+              <a:defRPr sz="3000" b="1">
+                <a:solidFill>
+                  <a:srgbClr val="132334"/>
+                </a:solidFill>
+              </a:defRPr>
+            </a:pPr>
+            <a:r>
+              <a:t>Ruta de la charla</a:t>
+            </a:r>
+          </a:p>
+        </p:txBody>
+      </p:sp>
+      <p:sp>
+        <p:nvSpPr>
           <p:cNvPr id="3" name="TextBox 2"/>
           <p:cNvSpPr txBox="1"/>
           <p:nvPr/>
         </p:nvSpPr>
         <p:spPr>
           <a:xfrm>
-            <a:off x="594360" y="347472"/>
-            <a:ext cx="7680960" cy="1097280"/>
+            <a:off x="621792" y="987552"/>
+            <a:ext cx="7772400" cy="731520"/>
           </a:xfrm>
           <a:prstGeom prst="rect">
             <a:avLst/>
@@ -5533,14 +6596,14 @@
           <a:lstStyle/>
           <a:p>
             <a:pPr>
-              <a:defRPr sz="3000" b="1">
-                <a:solidFill>
-                  <a:srgbClr val="132334"/>
-                </a:solidFill>
-              </a:defRPr>
-            </a:pPr>
-            <a:r>
-              <a:t>Computer Vision en operación</a:t>
+              <a:defRPr sz="1400">
+                <a:solidFill>
+                  <a:srgbClr val="606C79"/>
+                </a:solidFill>
+              </a:defRPr>
+            </a:pPr>
+            <a:r>
+              <a:t>30 min charla + 10 min demo + 5 min preguntas</a:t>
             </a:r>
           </a:p>
         </p:txBody>
@@ -5548,41 +6611,6 @@
       <p:sp>
         <p:nvSpPr>
           <p:cNvPr id="4" name="TextBox 3"/>
-          <p:cNvSpPr txBox="1"/>
-          <p:nvPr/>
-        </p:nvSpPr>
-        <p:spPr>
-          <a:xfrm>
-            <a:off x="621792" y="987552"/>
-            <a:ext cx="7772400" cy="731520"/>
-          </a:xfrm>
-          <a:prstGeom prst="rect">
-            <a:avLst/>
-          </a:prstGeom>
-          <a:noFill/>
-        </p:spPr>
-        <p:txBody>
-          <a:bodyPr wrap="none">
-            <a:spAutoFit/>
-          </a:bodyPr>
-          <a:lstStyle/>
-          <a:p>
-            <a:pPr>
-              <a:defRPr sz="1400">
-                <a:solidFill>
-                  <a:srgbClr val="606C79"/>
-                </a:solidFill>
-              </a:defRPr>
-            </a:pPr>
-            <a:r>
-              <a:t>Del video de obra a alertas de seguridad y progreso</a:t>
-            </a:r>
-          </a:p>
-        </p:txBody>
-      </p:sp>
-      <p:sp>
-        <p:nvSpPr>
-          <p:cNvPr id="5" name="TextBox 4"/>
           <p:cNvSpPr txBox="1"/>
           <p:nvPr/>
         </p:nvSpPr>
@@ -5613,7 +6641,7 @@
               </a:defRPr>
             </a:pPr>
             <a:r>
-              <a:t>• Detección de uso de EPP en zonas definidas de riesgo.</a:t>
+              <a:t>• Bloque 1 (10 min): desafíos reales de construcción y real estate en Guayaquil.</a:t>
             </a:r>
           </a:p>
           <a:p>
@@ -5628,7 +6656,7 @@
               </a:defRPr>
             </a:pPr>
             <a:r>
-              <a:t>• Conteo de avance visual por elemento construido vs. BIM.</a:t>
+              <a:t>• Bloque 2 (10 min): capa digital, datos operativos e IA aplicada.</a:t>
             </a:r>
           </a:p>
           <a:p>
@@ -5643,7 +6671,7 @@
               </a:defRPr>
             </a:pPr>
             <a:r>
-              <a:t>• Identificación de zonas congestionadas para optimizar logística.</a:t>
+              <a:t>• Bloque 3 (10 min): caso Torre Santiago, decisiones y plan de adopción.</a:t>
             </a:r>
           </a:p>
           <a:p>
@@ -5658,7 +6686,7 @@
               </a:defRPr>
             </a:pPr>
             <a:r>
-              <a:t>• Reporte automático diario para jefatura de obra y HSE.</a:t>
+              <a:t>• Demo (10 min): tablero + alerta predictiva + recomendación accionable.</a:t>
             </a:r>
           </a:p>
           <a:p>
@@ -5673,14 +6701,14 @@
               </a:defRPr>
             </a:pPr>
             <a:r>
-              <a:t>• Beneficio: supervisión más consistente sin depender solo del recorrido manual.</a:t>
+              <a:t>• Q&amp;A (5 min): cómo arrancar en universidad y en empresa este año.</a:t>
             </a:r>
           </a:p>
         </p:txBody>
       </p:sp>
       <p:pic>
         <p:nvPicPr>
-          <p:cNvPr id="6" name="Picture 5" descr="cv.png"/>
+          <p:cNvPr id="5" name="Picture 4" descr="context.png"/>
           <p:cNvPicPr>
             <a:picLocks noChangeAspect="1"/>
           </p:cNvPicPr>
@@ -5704,7 +6732,7 @@
       </p:pic>
       <p:sp>
         <p:nvSpPr>
-          <p:cNvPr id="7" name="Rectangle 6"/>
+          <p:cNvPr id="6" name="Rectangle 5"/>
           <p:cNvSpPr/>
           <p:nvPr/>
         </p:nvSpPr>
@@ -5747,7 +6775,7 @@
       </p:sp>
       <p:sp>
         <p:nvSpPr>
-          <p:cNvPr id="8" name="TextBox 7"/>
+          <p:cNvPr id="7" name="TextBox 6"/>
           <p:cNvSpPr txBox="1"/>
           <p:nvPr/>
         </p:nvSpPr>
@@ -5775,7 +6803,7 @@
               </a:defRPr>
             </a:pPr>
             <a:r>
-              <a:t>12</a:t>
+              <a:t>02</a:t>
             </a:r>
           </a:p>
         </p:txBody>
@@ -5788,9 +6816,17 @@
 </p:sld>
 </file>
 
-<file path=ppt/slides/slide13.xml><?xml version="1.0" encoding="utf-8"?>
+<file path=ppt/slides/slide3.xml><?xml version="1.0" encoding="utf-8"?>
 <p:sld xmlns:a="http://schemas.openxmlformats.org/drawingml/2006/main" xmlns:p="http://schemas.openxmlformats.org/presentationml/2006/main" xmlns:r="http://schemas.openxmlformats.org/officeDocument/2006/relationships">
   <p:cSld>
+    <p:bg>
+      <p:bgPr>
+        <a:solidFill>
+          <a:srgbClr val="F6F8FA"/>
+        </a:solidFill>
+        <a:effectLst/>
+      </p:bgPr>
+    </p:bg>
     <p:spTree>
       <p:nvGrpSpPr>
         <p:cNvPr id="1" name=""/>
@@ -5800,20 +6836,212 @@
       <p:grpSpPr/>
       <p:sp>
         <p:nvSpPr>
-          <p:cNvPr id="2" name="Rectangle 1"/>
+          <p:cNvPr id="2" name="TextBox 1"/>
+          <p:cNvSpPr txBox="1"/>
+          <p:nvPr/>
+        </p:nvSpPr>
+        <p:spPr>
+          <a:xfrm>
+            <a:off x="594360" y="347472"/>
+            <a:ext cx="7680960" cy="1097280"/>
+          </a:xfrm>
+          <a:prstGeom prst="rect">
+            <a:avLst/>
+          </a:prstGeom>
+          <a:noFill/>
+        </p:spPr>
+        <p:txBody>
+          <a:bodyPr wrap="none">
+            <a:spAutoFit/>
+          </a:bodyPr>
+          <a:lstStyle/>
+          <a:p>
+            <a:pPr>
+              <a:defRPr sz="3000" b="1">
+                <a:solidFill>
+                  <a:srgbClr val="132334"/>
+                </a:solidFill>
+              </a:defRPr>
+            </a:pPr>
+            <a:r>
+              <a:t>Guayaquil hoy: presión por ejecutar mejor</a:t>
+            </a:r>
+          </a:p>
+        </p:txBody>
+      </p:sp>
+      <p:sp>
+        <p:nvSpPr>
+          <p:cNvPr id="3" name="TextBox 2"/>
+          <p:cNvSpPr txBox="1"/>
+          <p:nvPr/>
+        </p:nvSpPr>
+        <p:spPr>
+          <a:xfrm>
+            <a:off x="621792" y="987552"/>
+            <a:ext cx="7772400" cy="731520"/>
+          </a:xfrm>
+          <a:prstGeom prst="rect">
+            <a:avLst/>
+          </a:prstGeom>
+          <a:noFill/>
+        </p:spPr>
+        <p:txBody>
+          <a:bodyPr wrap="none">
+            <a:spAutoFit/>
+          </a:bodyPr>
+          <a:lstStyle/>
+          <a:p>
+            <a:pPr>
+              <a:defRPr sz="1400">
+                <a:solidFill>
+                  <a:srgbClr val="606C79"/>
+                </a:solidFill>
+              </a:defRPr>
+            </a:pPr>
+            <a:r>
+              <a:t>Más demanda, más escrutinio, menos margen para improvisar</a:t>
+            </a:r>
+          </a:p>
+        </p:txBody>
+      </p:sp>
+      <p:sp>
+        <p:nvSpPr>
+          <p:cNvPr id="4" name="TextBox 3"/>
+          <p:cNvSpPr txBox="1"/>
+          <p:nvPr/>
+        </p:nvSpPr>
+        <p:spPr>
+          <a:xfrm>
+            <a:off x="713232" y="1600200"/>
+            <a:ext cx="6629400" cy="4480560"/>
+          </a:xfrm>
+          <a:prstGeom prst="rect">
+            <a:avLst/>
+          </a:prstGeom>
+          <a:noFill/>
+        </p:spPr>
+        <p:txBody>
+          <a:bodyPr wrap="none">
+            <a:spAutoFit/>
+          </a:bodyPr>
+          <a:lstStyle/>
+          <a:p>
+            <a:pPr>
+              <a:spcAft>
+                <a:spcPts val="1200"/>
+              </a:spcAft>
+              <a:defRPr sz="2100">
+                <a:solidFill>
+                  <a:srgbClr val="242C36"/>
+                </a:solidFill>
+              </a:defRPr>
+            </a:pPr>
+            <a:r>
+              <a:t>• El mercado exige plazos confiables para proyectos residenciales, mixtos y logísticos.</a:t>
+            </a:r>
+          </a:p>
+          <a:p>
+            <a:pPr>
+              <a:spcAft>
+                <a:spcPts val="1200"/>
+              </a:spcAft>
+              <a:defRPr sz="1900">
+                <a:solidFill>
+                  <a:srgbClr val="242C36"/>
+                </a:solidFill>
+              </a:defRPr>
+            </a:pPr>
+            <a:r>
+              <a:t>• Los sobrecostos impactan rentabilidad del desarrollador y flujo del contratista.</a:t>
+            </a:r>
+          </a:p>
+          <a:p>
+            <a:pPr>
+              <a:spcAft>
+                <a:spcPts val="1200"/>
+              </a:spcAft>
+              <a:defRPr sz="1900">
+                <a:solidFill>
+                  <a:srgbClr val="242C36"/>
+                </a:solidFill>
+              </a:defRPr>
+            </a:pPr>
+            <a:r>
+              <a:t>• Proveedores necesitan previsibilidad de compras para no romper cadena de suministro.</a:t>
+            </a:r>
+          </a:p>
+          <a:p>
+            <a:pPr>
+              <a:spcAft>
+                <a:spcPts val="1200"/>
+              </a:spcAft>
+              <a:defRPr sz="1900">
+                <a:solidFill>
+                  <a:srgbClr val="242C36"/>
+                </a:solidFill>
+              </a:defRPr>
+            </a:pPr>
+            <a:r>
+              <a:t>• La coordinación entre diseño, obra y comercial sigue siendo un cuello de botella.</a:t>
+            </a:r>
+          </a:p>
+          <a:p>
+            <a:pPr>
+              <a:spcAft>
+                <a:spcPts val="1200"/>
+              </a:spcAft>
+              <a:defRPr sz="1900">
+                <a:solidFill>
+                  <a:srgbClr val="242C36"/>
+                </a:solidFill>
+              </a:defRPr>
+            </a:pPr>
+            <a:r>
+              <a:t>• Resultado: quien controla datos y decisiones, controla el negocio.</a:t>
+            </a:r>
+          </a:p>
+        </p:txBody>
+      </p:sp>
+      <p:pic>
+        <p:nvPicPr>
+          <p:cNvPr id="5" name="Picture 4" descr="context.png"/>
+          <p:cNvPicPr>
+            <a:picLocks noChangeAspect="1"/>
+          </p:cNvPicPr>
+          <p:nvPr/>
+        </p:nvPicPr>
+        <p:blipFill>
+          <a:blip r:embed="rId2"/>
+          <a:stretch>
+            <a:fillRect/>
+          </a:stretch>
+        </p:blipFill>
+        <p:spPr>
+          <a:xfrm>
+            <a:off x="7543800" y="1325880"/>
+            <a:ext cx="4160520" cy="4800600"/>
+          </a:xfrm>
+          <a:prstGeom prst="rect">
+            <a:avLst/>
+          </a:prstGeom>
+        </p:spPr>
+      </p:pic>
+      <p:sp>
+        <p:nvSpPr>
+          <p:cNvPr id="6" name="Rectangle 5"/>
           <p:cNvSpPr/>
           <p:nvPr/>
         </p:nvSpPr>
         <p:spPr>
           <a:xfrm>
-            <a:off x="0" y="0"/>
-            <a:ext cx="12191695" cy="6858000"/>
+            <a:off x="594360" y="6446520"/>
+            <a:ext cx="11018520" cy="18288"/>
           </a:xfrm>
           <a:prstGeom prst="rect">
             <a:avLst/>
           </a:prstGeom>
           <a:solidFill>
-            <a:srgbClr val="F6F8FA"/>
+            <a:srgbClr val="008D96"/>
           </a:solidFill>
           <a:ln>
             <a:noFill/>
@@ -5843,14 +7071,110 @@
       </p:sp>
       <p:sp>
         <p:nvSpPr>
+          <p:cNvPr id="7" name="TextBox 6"/>
+          <p:cNvSpPr txBox="1"/>
+          <p:nvPr/>
+        </p:nvSpPr>
+        <p:spPr>
+          <a:xfrm>
+            <a:off x="10698480" y="6492240"/>
+            <a:ext cx="731520" cy="274320"/>
+          </a:xfrm>
+          <a:prstGeom prst="rect">
+            <a:avLst/>
+          </a:prstGeom>
+          <a:noFill/>
+        </p:spPr>
+        <p:txBody>
+          <a:bodyPr wrap="none">
+            <a:spAutoFit/>
+          </a:bodyPr>
+          <a:lstStyle/>
+          <a:p>
+            <a:pPr algn="r">
+              <a:defRPr sz="900">
+                <a:solidFill>
+                  <a:srgbClr val="606C79"/>
+                </a:solidFill>
+              </a:defRPr>
+            </a:pPr>
+            <a:r>
+              <a:t>03</a:t>
+            </a:r>
+          </a:p>
+        </p:txBody>
+      </p:sp>
+    </p:spTree>
+  </p:cSld>
+  <p:clrMapOvr>
+    <a:masterClrMapping/>
+  </p:clrMapOvr>
+</p:sld>
+</file>
+
+<file path=ppt/slides/slide4.xml><?xml version="1.0" encoding="utf-8"?>
+<p:sld xmlns:a="http://schemas.openxmlformats.org/drawingml/2006/main" xmlns:p="http://schemas.openxmlformats.org/presentationml/2006/main" xmlns:r="http://schemas.openxmlformats.org/officeDocument/2006/relationships">
+  <p:cSld>
+    <p:bg>
+      <p:bgPr>
+        <a:solidFill>
+          <a:srgbClr val="F6F8FA"/>
+        </a:solidFill>
+        <a:effectLst/>
+      </p:bgPr>
+    </p:bg>
+    <p:spTree>
+      <p:nvGrpSpPr>
+        <p:cNvPr id="1" name=""/>
+        <p:cNvGrpSpPr/>
+        <p:nvPr/>
+      </p:nvGrpSpPr>
+      <p:grpSpPr/>
+      <p:sp>
+        <p:nvSpPr>
+          <p:cNvPr id="2" name="TextBox 1"/>
+          <p:cNvSpPr txBox="1"/>
+          <p:nvPr/>
+        </p:nvSpPr>
+        <p:spPr>
+          <a:xfrm>
+            <a:off x="594360" y="347472"/>
+            <a:ext cx="7680960" cy="1097280"/>
+          </a:xfrm>
+          <a:prstGeom prst="rect">
+            <a:avLst/>
+          </a:prstGeom>
+          <a:noFill/>
+        </p:spPr>
+        <p:txBody>
+          <a:bodyPr wrap="none">
+            <a:spAutoFit/>
+          </a:bodyPr>
+          <a:lstStyle/>
+          <a:p>
+            <a:pPr>
+              <a:defRPr sz="3000" b="1">
+                <a:solidFill>
+                  <a:srgbClr val="132334"/>
+                </a:solidFill>
+              </a:defRPr>
+            </a:pPr>
+            <a:r>
+              <a:t>El costo oculto de la fragmentación</a:t>
+            </a:r>
+          </a:p>
+        </p:txBody>
+      </p:sp>
+      <p:sp>
+        <p:nvSpPr>
           <p:cNvPr id="3" name="TextBox 2"/>
           <p:cNvSpPr txBox="1"/>
           <p:nvPr/>
         </p:nvSpPr>
         <p:spPr>
           <a:xfrm>
-            <a:off x="594360" y="347472"/>
-            <a:ext cx="7680960" cy="1097280"/>
+            <a:off x="621792" y="987552"/>
+            <a:ext cx="7772400" cy="731520"/>
           </a:xfrm>
           <a:prstGeom prst="rect">
             <a:avLst/>
@@ -5864,14 +7188,14 @@
           <a:lstStyle/>
           <a:p>
             <a:pPr>
-              <a:defRPr sz="3000" b="1">
-                <a:solidFill>
-                  <a:srgbClr val="132334"/>
-                </a:solidFill>
-              </a:defRPr>
-            </a:pPr>
-            <a:r>
-              <a:t>Decisión integrada: comité semanal con evidencia</a:t>
+              <a:defRPr sz="1400">
+                <a:solidFill>
+                  <a:srgbClr val="606C79"/>
+                </a:solidFill>
+              </a:defRPr>
+            </a:pPr>
+            <a:r>
+              <a:t>Tenemos datos, pero dispersos en múltiples silos</a:t>
             </a:r>
           </a:p>
         </p:txBody>
@@ -5879,41 +7203,6 @@
       <p:sp>
         <p:nvSpPr>
           <p:cNvPr id="4" name="TextBox 3"/>
-          <p:cNvSpPr txBox="1"/>
-          <p:nvPr/>
-        </p:nvSpPr>
-        <p:spPr>
-          <a:xfrm>
-            <a:off x="621792" y="987552"/>
-            <a:ext cx="7772400" cy="731520"/>
-          </a:xfrm>
-          <a:prstGeom prst="rect">
-            <a:avLst/>
-          </a:prstGeom>
-          <a:noFill/>
-        </p:spPr>
-        <p:txBody>
-          <a:bodyPr wrap="none">
-            <a:spAutoFit/>
-          </a:bodyPr>
-          <a:lstStyle/>
-          <a:p>
-            <a:pPr>
-              <a:defRPr sz="1400">
-                <a:solidFill>
-                  <a:srgbClr val="606C79"/>
-                </a:solidFill>
-              </a:defRPr>
-            </a:pPr>
-            <a:r>
-              <a:t>Civil + Sistemas + Finanzas + Operaciones</a:t>
-            </a:r>
-          </a:p>
-        </p:txBody>
-      </p:sp>
-      <p:sp>
-        <p:nvSpPr>
-          <p:cNvPr id="5" name="TextBox 4"/>
           <p:cNvSpPr txBox="1"/>
           <p:nvPr/>
         </p:nvSpPr>
@@ -5944,7 +7233,7 @@
               </a:defRPr>
             </a:pPr>
             <a:r>
-              <a:t>• Dato común: una sola versión de cronograma, costo y avance.</a:t>
+              <a:t>• Cronograma vive en un archivo; avance real, en fotos y chats.</a:t>
             </a:r>
           </a:p>
           <a:p>
@@ -5959,7 +7248,7 @@
               </a:defRPr>
             </a:pPr>
             <a:r>
-              <a:t>• Priorización por impacto económico y riesgo contractual.</a:t>
+              <a:t>• Costos y compras se analizan tarde, cuando el desvío ya ocurrió.</a:t>
             </a:r>
           </a:p>
           <a:p>
@@ -5974,7 +7263,7 @@
               </a:defRPr>
             </a:pPr>
             <a:r>
-              <a:t>• Asignación clara de responsables y fechas de cierre.</a:t>
+              <a:t>• Riesgos de seguridad se reportan sin trazabilidad comparativa.</a:t>
             </a:r>
           </a:p>
           <a:p>
@@ -5989,7 +7278,7 @@
               </a:defRPr>
             </a:pPr>
             <a:r>
-              <a:t>• Seguimiento de cumplimiento con tablero ejecutivo.</a:t>
+              <a:t>• Dirección recibe reportes semanales, no señales tempranas diarias.</a:t>
             </a:r>
           </a:p>
           <a:p>
@@ -6004,14 +7293,14 @@
               </a:defRPr>
             </a:pPr>
             <a:r>
-              <a:t>• Resultado: menos discusión subjetiva, más ejecución coordinada.</a:t>
+              <a:t>• Sin integración, reaccionamos tarde y pagamos más.</a:t>
             </a:r>
           </a:p>
         </p:txBody>
       </p:sp>
       <p:pic>
         <p:nvPicPr>
-          <p:cNvPr id="6" name="Picture 5" descr="students.png"/>
+          <p:cNvPr id="5" name="Picture 4" descr="stack.png"/>
           <p:cNvPicPr>
             <a:picLocks noChangeAspect="1"/>
           </p:cNvPicPr>
@@ -6035,7 +7324,7 @@
       </p:pic>
       <p:sp>
         <p:nvSpPr>
-          <p:cNvPr id="7" name="Rectangle 6"/>
+          <p:cNvPr id="6" name="Rectangle 5"/>
           <p:cNvSpPr/>
           <p:nvPr/>
         </p:nvSpPr>
@@ -6078,7 +7367,7 @@
       </p:sp>
       <p:sp>
         <p:nvSpPr>
-          <p:cNvPr id="8" name="TextBox 7"/>
+          <p:cNvPr id="7" name="TextBox 6"/>
           <p:cNvSpPr txBox="1"/>
           <p:nvPr/>
         </p:nvSpPr>
@@ -6106,7 +7395,7 @@
               </a:defRPr>
             </a:pPr>
             <a:r>
-              <a:t>13</a:t>
+              <a:t>04</a:t>
             </a:r>
           </a:p>
         </p:txBody>
@@ -6119,9 +7408,17 @@
 </p:sld>
 </file>
 
-<file path=ppt/slides/slide14.xml><?xml version="1.0" encoding="utf-8"?>
+<file path=ppt/slides/slide5.xml><?xml version="1.0" encoding="utf-8"?>
 <p:sld xmlns:a="http://schemas.openxmlformats.org/drawingml/2006/main" xmlns:p="http://schemas.openxmlformats.org/presentationml/2006/main" xmlns:r="http://schemas.openxmlformats.org/officeDocument/2006/relationships">
   <p:cSld>
+    <p:bg>
+      <p:bgPr>
+        <a:solidFill>
+          <a:srgbClr val="F6F8FA"/>
+        </a:solidFill>
+        <a:effectLst/>
+      </p:bgPr>
+    </p:bg>
     <p:spTree>
       <p:nvGrpSpPr>
         <p:cNvPr id="1" name=""/>
@@ -6131,20 +7428,212 @@
       <p:grpSpPr/>
       <p:sp>
         <p:nvSpPr>
-          <p:cNvPr id="2" name="Rectangle 1"/>
+          <p:cNvPr id="2" name="TextBox 1"/>
+          <p:cNvSpPr txBox="1"/>
+          <p:nvPr/>
+        </p:nvSpPr>
+        <p:spPr>
+          <a:xfrm>
+            <a:off x="594360" y="347472"/>
+            <a:ext cx="7680960" cy="1097280"/>
+          </a:xfrm>
+          <a:prstGeom prst="rect">
+            <a:avLst/>
+          </a:prstGeom>
+          <a:noFill/>
+        </p:spPr>
+        <p:txBody>
+          <a:bodyPr wrap="none">
+            <a:spAutoFit/>
+          </a:bodyPr>
+          <a:lstStyle/>
+          <a:p>
+            <a:pPr>
+              <a:defRPr sz="3000" b="1">
+                <a:solidFill>
+                  <a:srgbClr val="132334"/>
+                </a:solidFill>
+              </a:defRPr>
+            </a:pPr>
+            <a:r>
+              <a:t>Qué llamamos ‘capa digital’</a:t>
+            </a:r>
+          </a:p>
+        </p:txBody>
+      </p:sp>
+      <p:sp>
+        <p:nvSpPr>
+          <p:cNvPr id="3" name="TextBox 2"/>
+          <p:cNvSpPr txBox="1"/>
+          <p:nvPr/>
+        </p:nvSpPr>
+        <p:spPr>
+          <a:xfrm>
+            <a:off x="621792" y="987552"/>
+            <a:ext cx="7772400" cy="731520"/>
+          </a:xfrm>
+          <a:prstGeom prst="rect">
+            <a:avLst/>
+          </a:prstGeom>
+          <a:noFill/>
+        </p:spPr>
+        <p:txBody>
+          <a:bodyPr wrap="none">
+            <a:spAutoFit/>
+          </a:bodyPr>
+          <a:lstStyle/>
+          <a:p>
+            <a:pPr>
+              <a:defRPr sz="1400">
+                <a:solidFill>
+                  <a:srgbClr val="606C79"/>
+                </a:solidFill>
+              </a:defRPr>
+            </a:pPr>
+            <a:r>
+              <a:t>Un sistema para pasar de dato suelto a decisión de obra</a:t>
+            </a:r>
+          </a:p>
+        </p:txBody>
+      </p:sp>
+      <p:sp>
+        <p:nvSpPr>
+          <p:cNvPr id="4" name="TextBox 3"/>
+          <p:cNvSpPr txBox="1"/>
+          <p:nvPr/>
+        </p:nvSpPr>
+        <p:spPr>
+          <a:xfrm>
+            <a:off x="713232" y="1600200"/>
+            <a:ext cx="6629400" cy="4480560"/>
+          </a:xfrm>
+          <a:prstGeom prst="rect">
+            <a:avLst/>
+          </a:prstGeom>
+          <a:noFill/>
+        </p:spPr>
+        <p:txBody>
+          <a:bodyPr wrap="none">
+            <a:spAutoFit/>
+          </a:bodyPr>
+          <a:lstStyle/>
+          <a:p>
+            <a:pPr>
+              <a:spcAft>
+                <a:spcPts val="1200"/>
+              </a:spcAft>
+              <a:defRPr sz="2100">
+                <a:solidFill>
+                  <a:srgbClr val="242C36"/>
+                </a:solidFill>
+              </a:defRPr>
+            </a:pPr>
+            <a:r>
+              <a:t>• Captura: maquinaria, partes diarios, BIM, clima, fotos de campo.</a:t>
+            </a:r>
+          </a:p>
+          <a:p>
+            <a:pPr>
+              <a:spcAft>
+                <a:spcPts val="1200"/>
+              </a:spcAft>
+              <a:defRPr sz="1900">
+                <a:solidFill>
+                  <a:srgbClr val="242C36"/>
+                </a:solidFill>
+              </a:defRPr>
+            </a:pPr>
+            <a:r>
+              <a:t>• Integración: un modelo de datos común por frente, actividad y costo.</a:t>
+            </a:r>
+          </a:p>
+          <a:p>
+            <a:pPr>
+              <a:spcAft>
+                <a:spcPts val="1200"/>
+              </a:spcAft>
+              <a:defRPr sz="1900">
+                <a:solidFill>
+                  <a:srgbClr val="242C36"/>
+                </a:solidFill>
+              </a:defRPr>
+            </a:pPr>
+            <a:r>
+              <a:t>• Analítica: indicadores de productividad, seguridad, avance y desvío.</a:t>
+            </a:r>
+          </a:p>
+          <a:p>
+            <a:pPr>
+              <a:spcAft>
+                <a:spcPts val="1200"/>
+              </a:spcAft>
+              <a:defRPr sz="1900">
+                <a:solidFill>
+                  <a:srgbClr val="242C36"/>
+                </a:solidFill>
+              </a:defRPr>
+            </a:pPr>
+            <a:r>
+              <a:t>• IA: alertas predictivas y explicación de causas probables.</a:t>
+            </a:r>
+          </a:p>
+          <a:p>
+            <a:pPr>
+              <a:spcAft>
+                <a:spcPts val="1200"/>
+              </a:spcAft>
+              <a:defRPr sz="1900">
+                <a:solidFill>
+                  <a:srgbClr val="242C36"/>
+                </a:solidFill>
+              </a:defRPr>
+            </a:pPr>
+            <a:r>
+              <a:t>• Acción: reunión de control con decisiones trazables y responsables.</a:t>
+            </a:r>
+          </a:p>
+        </p:txBody>
+      </p:sp>
+      <p:pic>
+        <p:nvPicPr>
+          <p:cNvPr id="5" name="Picture 4" descr="stack.png"/>
+          <p:cNvPicPr>
+            <a:picLocks noChangeAspect="1"/>
+          </p:cNvPicPr>
+          <p:nvPr/>
+        </p:nvPicPr>
+        <p:blipFill>
+          <a:blip r:embed="rId2"/>
+          <a:stretch>
+            <a:fillRect/>
+          </a:stretch>
+        </p:blipFill>
+        <p:spPr>
+          <a:xfrm>
+            <a:off x="7543800" y="1325880"/>
+            <a:ext cx="4160520" cy="4800600"/>
+          </a:xfrm>
+          <a:prstGeom prst="rect">
+            <a:avLst/>
+          </a:prstGeom>
+        </p:spPr>
+      </p:pic>
+      <p:sp>
+        <p:nvSpPr>
+          <p:cNvPr id="6" name="Rectangle 5"/>
           <p:cNvSpPr/>
           <p:nvPr/>
         </p:nvSpPr>
         <p:spPr>
           <a:xfrm>
-            <a:off x="0" y="0"/>
-            <a:ext cx="12191695" cy="6858000"/>
+            <a:off x="594360" y="6446520"/>
+            <a:ext cx="11018520" cy="18288"/>
           </a:xfrm>
           <a:prstGeom prst="rect">
             <a:avLst/>
           </a:prstGeom>
           <a:solidFill>
-            <a:srgbClr val="F6F8FA"/>
+            <a:srgbClr val="008D96"/>
           </a:solidFill>
           <a:ln>
             <a:noFill/>
@@ -6174,14 +7663,110 @@
       </p:sp>
       <p:sp>
         <p:nvSpPr>
+          <p:cNvPr id="7" name="TextBox 6"/>
+          <p:cNvSpPr txBox="1"/>
+          <p:nvPr/>
+        </p:nvSpPr>
+        <p:spPr>
+          <a:xfrm>
+            <a:off x="10698480" y="6492240"/>
+            <a:ext cx="731520" cy="274320"/>
+          </a:xfrm>
+          <a:prstGeom prst="rect">
+            <a:avLst/>
+          </a:prstGeom>
+          <a:noFill/>
+        </p:spPr>
+        <p:txBody>
+          <a:bodyPr wrap="none">
+            <a:spAutoFit/>
+          </a:bodyPr>
+          <a:lstStyle/>
+          <a:p>
+            <a:pPr algn="r">
+              <a:defRPr sz="900">
+                <a:solidFill>
+                  <a:srgbClr val="606C79"/>
+                </a:solidFill>
+              </a:defRPr>
+            </a:pPr>
+            <a:r>
+              <a:t>05</a:t>
+            </a:r>
+          </a:p>
+        </p:txBody>
+      </p:sp>
+    </p:spTree>
+  </p:cSld>
+  <p:clrMapOvr>
+    <a:masterClrMapping/>
+  </p:clrMapOvr>
+</p:sld>
+</file>
+
+<file path=ppt/slides/slide6.xml><?xml version="1.0" encoding="utf-8"?>
+<p:sld xmlns:a="http://schemas.openxmlformats.org/drawingml/2006/main" xmlns:p="http://schemas.openxmlformats.org/presentationml/2006/main" xmlns:r="http://schemas.openxmlformats.org/officeDocument/2006/relationships">
+  <p:cSld>
+    <p:bg>
+      <p:bgPr>
+        <a:solidFill>
+          <a:srgbClr val="F6F8FA"/>
+        </a:solidFill>
+        <a:effectLst/>
+      </p:bgPr>
+    </p:bg>
+    <p:spTree>
+      <p:nvGrpSpPr>
+        <p:cNvPr id="1" name=""/>
+        <p:cNvGrpSpPr/>
+        <p:nvPr/>
+      </p:nvGrpSpPr>
+      <p:grpSpPr/>
+      <p:sp>
+        <p:nvSpPr>
+          <p:cNvPr id="2" name="TextBox 1"/>
+          <p:cNvSpPr txBox="1"/>
+          <p:nvPr/>
+        </p:nvSpPr>
+        <p:spPr>
+          <a:xfrm>
+            <a:off x="594360" y="347472"/>
+            <a:ext cx="7680960" cy="1097280"/>
+          </a:xfrm>
+          <a:prstGeom prst="rect">
+            <a:avLst/>
+          </a:prstGeom>
+          <a:noFill/>
+        </p:spPr>
+        <p:txBody>
+          <a:bodyPr wrap="none">
+            <a:spAutoFit/>
+          </a:bodyPr>
+          <a:lstStyle/>
+          <a:p>
+            <a:pPr>
+              <a:defRPr sz="3000" b="1">
+                <a:solidFill>
+                  <a:srgbClr val="132334"/>
+                </a:solidFill>
+              </a:defRPr>
+            </a:pPr>
+            <a:r>
+              <a:t>Valor para industria: ROI operativo</a:t>
+            </a:r>
+          </a:p>
+        </p:txBody>
+      </p:sp>
+      <p:sp>
+        <p:nvSpPr>
           <p:cNvPr id="3" name="TextBox 2"/>
           <p:cNvSpPr txBox="1"/>
           <p:nvPr/>
         </p:nvSpPr>
         <p:spPr>
           <a:xfrm>
-            <a:off x="594360" y="347472"/>
-            <a:ext cx="7680960" cy="1097280"/>
+            <a:off x="621792" y="987552"/>
+            <a:ext cx="7772400" cy="731520"/>
           </a:xfrm>
           <a:prstGeom prst="rect">
             <a:avLst/>
@@ -6195,14 +7780,14 @@
           <a:lstStyle/>
           <a:p>
             <a:pPr>
-              <a:defRPr sz="3000" b="1">
-                <a:solidFill>
-                  <a:srgbClr val="132334"/>
-                </a:solidFill>
-              </a:defRPr>
-            </a:pPr>
-            <a:r>
-              <a:t>Plan de adopción en 90 días</a:t>
+              <a:defRPr sz="1400">
+                <a:solidFill>
+                  <a:srgbClr val="606C79"/>
+                </a:solidFill>
+              </a:defRPr>
+            </a:pPr>
+            <a:r>
+              <a:t>Desarrolladores, contratistas y proveedores</a:t>
             </a:r>
           </a:p>
         </p:txBody>
@@ -6210,41 +7795,6 @@
       <p:sp>
         <p:nvSpPr>
           <p:cNvPr id="4" name="TextBox 3"/>
-          <p:cNvSpPr txBox="1"/>
-          <p:nvPr/>
-        </p:nvSpPr>
-        <p:spPr>
-          <a:xfrm>
-            <a:off x="621792" y="987552"/>
-            <a:ext cx="7772400" cy="731520"/>
-          </a:xfrm>
-          <a:prstGeom prst="rect">
-            <a:avLst/>
-          </a:prstGeom>
-          <a:noFill/>
-        </p:spPr>
-        <p:txBody>
-          <a:bodyPr wrap="none">
-            <a:spAutoFit/>
-          </a:bodyPr>
-          <a:lstStyle/>
-          <a:p>
-            <a:pPr>
-              <a:defRPr sz="1400">
-                <a:solidFill>
-                  <a:srgbClr val="606C79"/>
-                </a:solidFill>
-              </a:defRPr>
-            </a:pPr>
-            <a:r>
-              <a:t>Piloto realista para empresa o alianza universidad-industria</a:t>
-            </a:r>
-          </a:p>
-        </p:txBody>
-      </p:sp>
-      <p:sp>
-        <p:nvSpPr>
-          <p:cNvPr id="5" name="TextBox 4"/>
           <p:cNvSpPr txBox="1"/>
           <p:nvPr/>
         </p:nvSpPr>
@@ -6275,7 +7825,7 @@
               </a:defRPr>
             </a:pPr>
             <a:r>
-              <a:t>• Semana 1-2: definir caso prioritario (retraso, seguridad o productividad).</a:t>
+              <a:t>• Menos retrasos críticos por alertas tempranas en ruta de obra.</a:t>
             </a:r>
           </a:p>
           <a:p>
@@ -6290,7 +7840,7 @@
               </a:defRPr>
             </a:pPr>
             <a:r>
-              <a:t>• Semana 3-5: conectar fuentes mínimas de datos y tablero operativo.</a:t>
+              <a:t>• Mayor productividad al detectar frentes subutilizados.</a:t>
             </a:r>
           </a:p>
           <a:p>
@@ -6305,7 +7855,7 @@
               </a:defRPr>
             </a:pPr>
             <a:r>
-              <a:t>• Semana 6-8: correr modelo predictivo y validar con equipo de obra.</a:t>
+              <a:t>• Menos reprocesos por mejor coordinación diseño-campo.</a:t>
             </a:r>
           </a:p>
           <a:p>
@@ -6320,7 +7870,7 @@
               </a:defRPr>
             </a:pPr>
             <a:r>
-              <a:t>• Semana 9-12: medir ROI (tiempo, costo, incidentes, retrabajo).</a:t>
+              <a:t>• Mejor seguridad con monitoreo de comportamientos de riesgo.</a:t>
             </a:r>
           </a:p>
           <a:p>
@@ -6335,14 +7885,14 @@
               </a:defRPr>
             </a:pPr>
             <a:r>
-              <a:t>• Escalamiento: estandarizar metodología para nuevos proyectos.</a:t>
+              <a:t>• Más confianza para inversionistas por trazabilidad y control.</a:t>
             </a:r>
           </a:p>
         </p:txBody>
       </p:sp>
       <p:pic>
         <p:nvPicPr>
-          <p:cNvPr id="6" name="Picture 5" descr="close.png"/>
+          <p:cNvPr id="5" name="Picture 4" descr="opening.png"/>
           <p:cNvPicPr>
             <a:picLocks noChangeAspect="1"/>
           </p:cNvPicPr>
@@ -6366,7 +7916,7 @@
       </p:pic>
       <p:sp>
         <p:nvSpPr>
-          <p:cNvPr id="7" name="Rectangle 6"/>
+          <p:cNvPr id="6" name="Rectangle 5"/>
           <p:cNvSpPr/>
           <p:nvPr/>
         </p:nvSpPr>
@@ -6409,7 +7959,7 @@
       </p:sp>
       <p:sp>
         <p:nvSpPr>
-          <p:cNvPr id="8" name="TextBox 7"/>
+          <p:cNvPr id="7" name="TextBox 6"/>
           <p:cNvSpPr txBox="1"/>
           <p:nvPr/>
         </p:nvSpPr>
@@ -6437,7 +7987,7 @@
               </a:defRPr>
             </a:pPr>
             <a:r>
-              <a:t>14</a:t>
+              <a:t>06</a:t>
             </a:r>
           </a:p>
         </p:txBody>
@@ -6450,9 +8000,17 @@
 </p:sld>
 </file>
 
-<file path=ppt/slides/slide15.xml><?xml version="1.0" encoding="utf-8"?>
+<file path=ppt/slides/slide7.xml><?xml version="1.0" encoding="utf-8"?>
 <p:sld xmlns:a="http://schemas.openxmlformats.org/drawingml/2006/main" xmlns:p="http://schemas.openxmlformats.org/presentationml/2006/main" xmlns:r="http://schemas.openxmlformats.org/officeDocument/2006/relationships">
   <p:cSld>
+    <p:bg>
+      <p:bgPr>
+        <a:solidFill>
+          <a:srgbClr val="F6F8FA"/>
+        </a:solidFill>
+        <a:effectLst/>
+      </p:bgPr>
+    </p:bg>
     <p:spTree>
       <p:nvGrpSpPr>
         <p:cNvPr id="1" name=""/>
@@ -6462,20 +8020,212 @@
       <p:grpSpPr/>
       <p:sp>
         <p:nvSpPr>
-          <p:cNvPr id="2" name="Rectangle 1"/>
+          <p:cNvPr id="2" name="TextBox 1"/>
+          <p:cNvSpPr txBox="1"/>
+          <p:nvPr/>
+        </p:nvSpPr>
+        <p:spPr>
+          <a:xfrm>
+            <a:off x="594360" y="347472"/>
+            <a:ext cx="7680960" cy="1097280"/>
+          </a:xfrm>
+          <a:prstGeom prst="rect">
+            <a:avLst/>
+          </a:prstGeom>
+          <a:noFill/>
+        </p:spPr>
+        <p:txBody>
+          <a:bodyPr wrap="none">
+            <a:spAutoFit/>
+          </a:bodyPr>
+          <a:lstStyle/>
+          <a:p>
+            <a:pPr>
+              <a:defRPr sz="3000" b="1">
+                <a:solidFill>
+                  <a:srgbClr val="132334"/>
+                </a:solidFill>
+              </a:defRPr>
+            </a:pPr>
+            <a:r>
+              <a:t>Valor para estudiantes: empleabilidad real</a:t>
+            </a:r>
+          </a:p>
+        </p:txBody>
+      </p:sp>
+      <p:sp>
+        <p:nvSpPr>
+          <p:cNvPr id="3" name="TextBox 2"/>
+          <p:cNvSpPr txBox="1"/>
+          <p:nvPr/>
+        </p:nvSpPr>
+        <p:spPr>
+          <a:xfrm>
+            <a:off x="621792" y="987552"/>
+            <a:ext cx="7772400" cy="731520"/>
+          </a:xfrm>
+          <a:prstGeom prst="rect">
+            <a:avLst/>
+          </a:prstGeom>
+          <a:noFill/>
+        </p:spPr>
+        <p:txBody>
+          <a:bodyPr wrap="none">
+            <a:spAutoFit/>
+          </a:bodyPr>
+          <a:lstStyle/>
+          <a:p>
+            <a:pPr>
+              <a:defRPr sz="1400">
+                <a:solidFill>
+                  <a:srgbClr val="606C79"/>
+                </a:solidFill>
+              </a:defRPr>
+            </a:pPr>
+            <a:r>
+              <a:t>Perfil híbrido Civil + Sistemas como ventaja profesional</a:t>
+            </a:r>
+          </a:p>
+        </p:txBody>
+      </p:sp>
+      <p:sp>
+        <p:nvSpPr>
+          <p:cNvPr id="4" name="TextBox 3"/>
+          <p:cNvSpPr txBox="1"/>
+          <p:nvPr/>
+        </p:nvSpPr>
+        <p:spPr>
+          <a:xfrm>
+            <a:off x="713232" y="1600200"/>
+            <a:ext cx="6629400" cy="4480560"/>
+          </a:xfrm>
+          <a:prstGeom prst="rect">
+            <a:avLst/>
+          </a:prstGeom>
+          <a:noFill/>
+        </p:spPr>
+        <p:txBody>
+          <a:bodyPr wrap="none">
+            <a:spAutoFit/>
+          </a:bodyPr>
+          <a:lstStyle/>
+          <a:p>
+            <a:pPr>
+              <a:spcAft>
+                <a:spcPts val="1200"/>
+              </a:spcAft>
+              <a:defRPr sz="2100">
+                <a:solidFill>
+                  <a:srgbClr val="242C36"/>
+                </a:solidFill>
+              </a:defRPr>
+            </a:pPr>
+            <a:r>
+              <a:t>• Comprender obra + modelar datos = perfil altamente demandado.</a:t>
+            </a:r>
+          </a:p>
+          <a:p>
+            <a:pPr>
+              <a:spcAft>
+                <a:spcPts val="1200"/>
+              </a:spcAft>
+              <a:defRPr sz="1900">
+                <a:solidFill>
+                  <a:srgbClr val="242C36"/>
+                </a:solidFill>
+              </a:defRPr>
+            </a:pPr>
+            <a:r>
+              <a:t>• Nuevos roles: planner analítico, coordinador BIM-datos, PM digital.</a:t>
+            </a:r>
+          </a:p>
+          <a:p>
+            <a:pPr>
+              <a:spcAft>
+                <a:spcPts val="1200"/>
+              </a:spcAft>
+              <a:defRPr sz="1900">
+                <a:solidFill>
+                  <a:srgbClr val="242C36"/>
+                </a:solidFill>
+              </a:defRPr>
+            </a:pPr>
+            <a:r>
+              <a:t>• Competencias clave: SQL, dashboards, lectura de KPIs de obra, IA aplicada.</a:t>
+            </a:r>
+          </a:p>
+          <a:p>
+            <a:pPr>
+              <a:spcAft>
+                <a:spcPts val="1200"/>
+              </a:spcAft>
+              <a:defRPr sz="1900">
+                <a:solidFill>
+                  <a:srgbClr val="242C36"/>
+                </a:solidFill>
+              </a:defRPr>
+            </a:pPr>
+            <a:r>
+              <a:t>• La práctica profesional migrará de reporte manual a gestión asistida por datos.</a:t>
+            </a:r>
+          </a:p>
+          <a:p>
+            <a:pPr>
+              <a:spcAft>
+                <a:spcPts val="1200"/>
+              </a:spcAft>
+              <a:defRPr sz="1900">
+                <a:solidFill>
+                  <a:srgbClr val="242C36"/>
+                </a:solidFill>
+              </a:defRPr>
+            </a:pPr>
+            <a:r>
+              <a:t>• No reemplazo: mayor capacidad de criterio técnico y liderazgo.</a:t>
+            </a:r>
+          </a:p>
+        </p:txBody>
+      </p:sp>
+      <p:pic>
+        <p:nvPicPr>
+          <p:cNvPr id="5" name="Picture 4" descr="students.png"/>
+          <p:cNvPicPr>
+            <a:picLocks noChangeAspect="1"/>
+          </p:cNvPicPr>
+          <p:nvPr/>
+        </p:nvPicPr>
+        <p:blipFill>
+          <a:blip r:embed="rId2"/>
+          <a:stretch>
+            <a:fillRect/>
+          </a:stretch>
+        </p:blipFill>
+        <p:spPr>
+          <a:xfrm>
+            <a:off x="7543800" y="1325880"/>
+            <a:ext cx="4160520" cy="4800600"/>
+          </a:xfrm>
+          <a:prstGeom prst="rect">
+            <a:avLst/>
+          </a:prstGeom>
+        </p:spPr>
+      </p:pic>
+      <p:sp>
+        <p:nvSpPr>
+          <p:cNvPr id="6" name="Rectangle 5"/>
           <p:cNvSpPr/>
           <p:nvPr/>
         </p:nvSpPr>
         <p:spPr>
           <a:xfrm>
-            <a:off x="0" y="0"/>
-            <a:ext cx="12191695" cy="6858000"/>
+            <a:off x="594360" y="6446520"/>
+            <a:ext cx="11018520" cy="18288"/>
           </a:xfrm>
           <a:prstGeom prst="rect">
             <a:avLst/>
           </a:prstGeom>
           <a:solidFill>
-            <a:srgbClr val="132334"/>
+            <a:srgbClr val="008D96"/>
           </a:solidFill>
           <a:ln>
             <a:noFill/>
@@ -6505,14 +8255,110 @@
       </p:sp>
       <p:sp>
         <p:nvSpPr>
+          <p:cNvPr id="7" name="TextBox 6"/>
+          <p:cNvSpPr txBox="1"/>
+          <p:nvPr/>
+        </p:nvSpPr>
+        <p:spPr>
+          <a:xfrm>
+            <a:off x="10698480" y="6492240"/>
+            <a:ext cx="731520" cy="274320"/>
+          </a:xfrm>
+          <a:prstGeom prst="rect">
+            <a:avLst/>
+          </a:prstGeom>
+          <a:noFill/>
+        </p:spPr>
+        <p:txBody>
+          <a:bodyPr wrap="none">
+            <a:spAutoFit/>
+          </a:bodyPr>
+          <a:lstStyle/>
+          <a:p>
+            <a:pPr algn="r">
+              <a:defRPr sz="900">
+                <a:solidFill>
+                  <a:srgbClr val="606C79"/>
+                </a:solidFill>
+              </a:defRPr>
+            </a:pPr>
+            <a:r>
+              <a:t>07</a:t>
+            </a:r>
+          </a:p>
+        </p:txBody>
+      </p:sp>
+    </p:spTree>
+  </p:cSld>
+  <p:clrMapOvr>
+    <a:masterClrMapping/>
+  </p:clrMapOvr>
+</p:sld>
+</file>
+
+<file path=ppt/slides/slide8.xml><?xml version="1.0" encoding="utf-8"?>
+<p:sld xmlns:a="http://schemas.openxmlformats.org/drawingml/2006/main" xmlns:p="http://schemas.openxmlformats.org/presentationml/2006/main" xmlns:r="http://schemas.openxmlformats.org/officeDocument/2006/relationships">
+  <p:cSld>
+    <p:bg>
+      <p:bgPr>
+        <a:solidFill>
+          <a:srgbClr val="132334"/>
+        </a:solidFill>
+        <a:effectLst/>
+      </p:bgPr>
+    </p:bg>
+    <p:spTree>
+      <p:nvGrpSpPr>
+        <p:cNvPr id="1" name=""/>
+        <p:cNvGrpSpPr/>
+        <p:nvPr/>
+      </p:nvGrpSpPr>
+      <p:grpSpPr/>
+      <p:sp>
+        <p:nvSpPr>
+          <p:cNvPr id="2" name="TextBox 1"/>
+          <p:cNvSpPr txBox="1"/>
+          <p:nvPr/>
+        </p:nvSpPr>
+        <p:spPr>
+          <a:xfrm>
+            <a:off x="594360" y="347472"/>
+            <a:ext cx="7680960" cy="1097280"/>
+          </a:xfrm>
+          <a:prstGeom prst="rect">
+            <a:avLst/>
+          </a:prstGeom>
+          <a:noFill/>
+        </p:spPr>
+        <p:txBody>
+          <a:bodyPr wrap="none">
+            <a:spAutoFit/>
+          </a:bodyPr>
+          <a:lstStyle/>
+          <a:p>
+            <a:pPr>
+              <a:defRPr sz="3000" b="1">
+                <a:solidFill>
+                  <a:srgbClr val="FFFFFF"/>
+                </a:solidFill>
+              </a:defRPr>
+            </a:pPr>
+            <a:r>
+              <a:t>Caso de estudio: Torre Santiago (ficticio, plausible)</a:t>
+            </a:r>
+          </a:p>
+        </p:txBody>
+      </p:sp>
+      <p:sp>
+        <p:nvSpPr>
           <p:cNvPr id="3" name="TextBox 2"/>
           <p:cNvSpPr txBox="1"/>
           <p:nvPr/>
         </p:nvSpPr>
         <p:spPr>
           <a:xfrm>
-            <a:off x="594360" y="347472"/>
-            <a:ext cx="7680960" cy="1097280"/>
+            <a:off x="621792" y="987552"/>
+            <a:ext cx="7772400" cy="731520"/>
           </a:xfrm>
           <a:prstGeom prst="rect">
             <a:avLst/>
@@ -6526,103 +8372,21 @@
           <a:lstStyle/>
           <a:p>
             <a:pPr>
-              <a:defRPr sz="3000" b="1">
+              <a:defRPr sz="1400">
                 <a:solidFill>
                   <a:srgbClr val="FFFFFF"/>
                 </a:solidFill>
               </a:defRPr>
             </a:pPr>
             <a:r>
-              <a:t>Cierre</a:t>
-            </a:r>
-          </a:p>
-        </p:txBody>
-      </p:sp>
-      <p:sp>
-        <p:nvSpPr>
-          <p:cNvPr id="4" name="TextBox 3"/>
-          <p:cNvSpPr txBox="1"/>
-          <p:nvPr/>
-        </p:nvSpPr>
-        <p:spPr>
-          <a:xfrm>
-            <a:off x="621792" y="987552"/>
-            <a:ext cx="7772400" cy="731520"/>
-          </a:xfrm>
-          <a:prstGeom prst="rect">
-            <a:avLst/>
-          </a:prstGeom>
-          <a:noFill/>
-        </p:spPr>
-        <p:txBody>
-          <a:bodyPr wrap="none">
-            <a:spAutoFit/>
-          </a:bodyPr>
-          <a:lstStyle/>
-          <a:p>
-            <a:pPr>
-              <a:defRPr sz="1400">
-                <a:solidFill>
-                  <a:srgbClr val="FFFFFF"/>
-                </a:solidFill>
-              </a:defRPr>
-            </a:pPr>
-            <a:r>
-              <a:t>La próxima ventaja competitiva en construcción ecuatoriana será técnico-digital</a:t>
-            </a:r>
-          </a:p>
-        </p:txBody>
-      </p:sp>
-      <p:sp>
-        <p:nvSpPr>
-          <p:cNvPr id="5" name="TextBox 4"/>
-          <p:cNvSpPr txBox="1"/>
-          <p:nvPr/>
-        </p:nvSpPr>
-        <p:spPr>
-          <a:xfrm>
-            <a:off x="731520" y="1828800"/>
-            <a:ext cx="6583680" cy="2377440"/>
-          </a:xfrm>
-          <a:prstGeom prst="rect">
-            <a:avLst/>
-          </a:prstGeom>
-          <a:noFill/>
-        </p:spPr>
-        <p:txBody>
-          <a:bodyPr wrap="none">
-            <a:spAutoFit/>
-          </a:bodyPr>
-          <a:lstStyle/>
-          <a:p>
-            <a:pPr>
-              <a:defRPr sz="3600" b="1">
-                <a:solidFill>
-                  <a:srgbClr val="FFFFFF"/>
-                </a:solidFill>
-              </a:defRPr>
-            </a:pPr>
-            <a:r>
-              <a:t>No se trata de tener más datos.</a:t>
-            </a:r>
-          </a:p>
-          <a:p>
-            <a:pPr>
-              <a:defRPr sz="3400" b="1">
-                <a:solidFill>
-                  <a:srgbClr val="008D96"/>
-                </a:solidFill>
-              </a:defRPr>
-            </a:pPr>
-            <a:r>
-              <a:t>Se trata de convertirlos en decisiones a tiempo.</a:t>
+              <a:t>Edificio residencial de 22 niveles en Guayaquil norte</a:t>
             </a:r>
           </a:p>
         </p:txBody>
       </p:sp>
       <p:pic>
         <p:nvPicPr>
-          <p:cNvPr id="6" name="Picture 5" descr="opening.png"/>
+          <p:cNvPr id="4" name="Picture 3" descr="case.png"/>
           <p:cNvPicPr>
             <a:picLocks noChangeAspect="1"/>
           </p:cNvPicPr>
@@ -6636,8 +8400,8 @@
         </p:blipFill>
         <p:spPr>
           <a:xfrm>
-            <a:off x="7360920" y="1554480"/>
-            <a:ext cx="3840480" cy="4297680"/>
+            <a:off x="594360" y="1645920"/>
+            <a:ext cx="11018520" cy="4389120"/>
           </a:xfrm>
           <a:prstGeom prst="rect">
             <a:avLst/>
@@ -6646,42 +8410,7 @@
       </p:pic>
       <p:sp>
         <p:nvSpPr>
-          <p:cNvPr id="7" name="TextBox 6"/>
-          <p:cNvSpPr txBox="1"/>
-          <p:nvPr/>
-        </p:nvSpPr>
-        <p:spPr>
-          <a:xfrm>
-            <a:off x="731520" y="4800600"/>
-            <a:ext cx="6400800" cy="1280160"/>
-          </a:xfrm>
-          <a:prstGeom prst="rect">
-            <a:avLst/>
-          </a:prstGeom>
-          <a:noFill/>
-        </p:spPr>
-        <p:txBody>
-          <a:bodyPr wrap="none">
-            <a:spAutoFit/>
-          </a:bodyPr>
-          <a:lstStyle/>
-          <a:p>
-            <a:pPr>
-              <a:defRPr sz="2000">
-                <a:solidFill>
-                  <a:srgbClr val="FFFFFF"/>
-                </a:solidFill>
-              </a:defRPr>
-            </a:pPr>
-            <a:r>
-              <a:t>Siguiente: demo en vivo (10 min) + preguntas (5 min).</a:t>
-            </a:r>
-          </a:p>
-        </p:txBody>
-      </p:sp>
-      <p:sp>
-        <p:nvSpPr>
-          <p:cNvPr id="8" name="Rectangle 7"/>
+          <p:cNvPr id="5" name="Rectangle 4"/>
           <p:cNvSpPr/>
           <p:nvPr/>
         </p:nvSpPr>
@@ -6724,7 +8453,7 @@
       </p:sp>
       <p:sp>
         <p:nvSpPr>
-          <p:cNvPr id="9" name="TextBox 8"/>
+          <p:cNvPr id="6" name="TextBox 5"/>
           <p:cNvSpPr txBox="1"/>
           <p:nvPr/>
         </p:nvSpPr>
@@ -6752,7 +8481,7 @@
               </a:defRPr>
             </a:pPr>
             <a:r>
-              <a:t>15</a:t>
+              <a:t>08</a:t>
             </a:r>
           </a:p>
         </p:txBody>
@@ -6765,9 +8494,17 @@
 </p:sld>
 </file>
 
-<file path=ppt/slides/slide2.xml><?xml version="1.0" encoding="utf-8"?>
+<file path=ppt/slides/slide9.xml><?xml version="1.0" encoding="utf-8"?>
 <p:sld xmlns:a="http://schemas.openxmlformats.org/drawingml/2006/main" xmlns:p="http://schemas.openxmlformats.org/presentationml/2006/main" xmlns:r="http://schemas.openxmlformats.org/officeDocument/2006/relationships">
   <p:cSld>
+    <p:bg>
+      <p:bgPr>
+        <a:solidFill>
+          <a:srgbClr val="F6F8FA"/>
+        </a:solidFill>
+        <a:effectLst/>
+      </p:bgPr>
+    </p:bg>
     <p:spTree>
       <p:nvGrpSpPr>
         <p:cNvPr id="1" name=""/>
@@ -6777,20 +8514,212 @@
       <p:grpSpPr/>
       <p:sp>
         <p:nvSpPr>
-          <p:cNvPr id="2" name="Rectangle 1"/>
+          <p:cNvPr id="2" name="TextBox 1"/>
+          <p:cNvSpPr txBox="1"/>
+          <p:nvPr/>
+        </p:nvSpPr>
+        <p:spPr>
+          <a:xfrm>
+            <a:off x="594360" y="347472"/>
+            <a:ext cx="7680960" cy="1097280"/>
+          </a:xfrm>
+          <a:prstGeom prst="rect">
+            <a:avLst/>
+          </a:prstGeom>
+          <a:noFill/>
+        </p:spPr>
+        <p:txBody>
+          <a:bodyPr wrap="none">
+            <a:spAutoFit/>
+          </a:bodyPr>
+          <a:lstStyle/>
+          <a:p>
+            <a:pPr>
+              <a:defRPr sz="3000" b="1">
+                <a:solidFill>
+                  <a:srgbClr val="132334"/>
+                </a:solidFill>
+              </a:defRPr>
+            </a:pPr>
+            <a:r>
+              <a:t>Torre Santiago: línea base</a:t>
+            </a:r>
+          </a:p>
+        </p:txBody>
+      </p:sp>
+      <p:sp>
+        <p:nvSpPr>
+          <p:cNvPr id="3" name="TextBox 2"/>
+          <p:cNvSpPr txBox="1"/>
+          <p:nvPr/>
+        </p:nvSpPr>
+        <p:spPr>
+          <a:xfrm>
+            <a:off x="621792" y="987552"/>
+            <a:ext cx="7772400" cy="731520"/>
+          </a:xfrm>
+          <a:prstGeom prst="rect">
+            <a:avLst/>
+          </a:prstGeom>
+          <a:noFill/>
+        </p:spPr>
+        <p:txBody>
+          <a:bodyPr wrap="none">
+            <a:spAutoFit/>
+          </a:bodyPr>
+          <a:lstStyle/>
+          <a:p>
+            <a:pPr>
+              <a:defRPr sz="1400">
+                <a:solidFill>
+                  <a:srgbClr val="606C79"/>
+                </a:solidFill>
+              </a:defRPr>
+            </a:pPr>
+            <a:r>
+              <a:t>Semana 24 de un plan de 14 meses</a:t>
+            </a:r>
+          </a:p>
+        </p:txBody>
+      </p:sp>
+      <p:sp>
+        <p:nvSpPr>
+          <p:cNvPr id="4" name="TextBox 3"/>
+          <p:cNvSpPr txBox="1"/>
+          <p:nvPr/>
+        </p:nvSpPr>
+        <p:spPr>
+          <a:xfrm>
+            <a:off x="713232" y="1600200"/>
+            <a:ext cx="6629400" cy="4480560"/>
+          </a:xfrm>
+          <a:prstGeom prst="rect">
+            <a:avLst/>
+          </a:prstGeom>
+          <a:noFill/>
+        </p:spPr>
+        <p:txBody>
+          <a:bodyPr wrap="none">
+            <a:spAutoFit/>
+          </a:bodyPr>
+          <a:lstStyle/>
+          <a:p>
+            <a:pPr>
+              <a:spcAft>
+                <a:spcPts val="1200"/>
+              </a:spcAft>
+              <a:defRPr sz="2100">
+                <a:solidFill>
+                  <a:srgbClr val="242C36"/>
+                </a:solidFill>
+              </a:defRPr>
+            </a:pPr>
+            <a:r>
+              <a:t>• Presupuesto contractual: USD 14.8 millones.</a:t>
+            </a:r>
+          </a:p>
+          <a:p>
+            <a:pPr>
+              <a:spcAft>
+                <a:spcPts val="1200"/>
+              </a:spcAft>
+              <a:defRPr sz="1900">
+                <a:solidFill>
+                  <a:srgbClr val="242C36"/>
+                </a:solidFill>
+              </a:defRPr>
+            </a:pPr>
+            <a:r>
+              <a:t>• Avance planificado: 58% | avance real: 49%.</a:t>
+            </a:r>
+          </a:p>
+          <a:p>
+            <a:pPr>
+              <a:spcAft>
+                <a:spcPts val="1200"/>
+              </a:spcAft>
+              <a:defRPr sz="1900">
+                <a:solidFill>
+                  <a:srgbClr val="242C36"/>
+                </a:solidFill>
+              </a:defRPr>
+            </a:pPr>
+            <a:r>
+              <a:t>• Equipos críticos: grúa torre, bomba de hormigón, encofrado.</a:t>
+            </a:r>
+          </a:p>
+          <a:p>
+            <a:pPr>
+              <a:spcAft>
+                <a:spcPts val="1200"/>
+              </a:spcAft>
+              <a:defRPr sz="1900">
+                <a:solidFill>
+                  <a:srgbClr val="242C36"/>
+                </a:solidFill>
+              </a:defRPr>
+            </a:pPr>
+            <a:r>
+              <a:t>• Incidentes de seguridad leves: 6 (meta trimestral: &lt;=2).</a:t>
+            </a:r>
+          </a:p>
+          <a:p>
+            <a:pPr>
+              <a:spcAft>
+                <a:spcPts val="1200"/>
+              </a:spcAft>
+              <a:defRPr sz="1900">
+                <a:solidFill>
+                  <a:srgbClr val="242C36"/>
+                </a:solidFill>
+              </a:defRPr>
+            </a:pPr>
+            <a:r>
+              <a:t>• Riesgo de caja: certificación del hito comercial en 5 semanas.</a:t>
+            </a:r>
+          </a:p>
+        </p:txBody>
+      </p:sp>
+      <p:pic>
+        <p:nvPicPr>
+          <p:cNvPr id="5" name="Picture 4" descr="case.png"/>
+          <p:cNvPicPr>
+            <a:picLocks noChangeAspect="1"/>
+          </p:cNvPicPr>
+          <p:nvPr/>
+        </p:nvPicPr>
+        <p:blipFill>
+          <a:blip r:embed="rId2"/>
+          <a:stretch>
+            <a:fillRect/>
+          </a:stretch>
+        </p:blipFill>
+        <p:spPr>
+          <a:xfrm>
+            <a:off x="7543800" y="1325880"/>
+            <a:ext cx="4160520" cy="4800600"/>
+          </a:xfrm>
+          <a:prstGeom prst="rect">
+            <a:avLst/>
+          </a:prstGeom>
+        </p:spPr>
+      </p:pic>
+      <p:sp>
+        <p:nvSpPr>
+          <p:cNvPr id="6" name="Rectangle 5"/>
           <p:cNvSpPr/>
           <p:nvPr/>
         </p:nvSpPr>
         <p:spPr>
           <a:xfrm>
-            <a:off x="0" y="0"/>
-            <a:ext cx="12191695" cy="6858000"/>
+            <a:off x="594360" y="6446520"/>
+            <a:ext cx="11018520" cy="18288"/>
           </a:xfrm>
           <a:prstGeom prst="rect">
             <a:avLst/>
           </a:prstGeom>
           <a:solidFill>
-            <a:srgbClr val="F6F8FA"/>
+            <a:srgbClr val="008D96"/>
           </a:solidFill>
           <a:ln>
             <a:noFill/>
@@ -6820,2461 +8749,7 @@
       </p:sp>
       <p:sp>
         <p:nvSpPr>
-          <p:cNvPr id="3" name="TextBox 2"/>
-          <p:cNvSpPr txBox="1"/>
-          <p:nvPr/>
-        </p:nvSpPr>
-        <p:spPr>
-          <a:xfrm>
-            <a:off x="594360" y="347472"/>
-            <a:ext cx="7680960" cy="1097280"/>
-          </a:xfrm>
-          <a:prstGeom prst="rect">
-            <a:avLst/>
-          </a:prstGeom>
-          <a:noFill/>
-        </p:spPr>
-        <p:txBody>
-          <a:bodyPr wrap="none">
-            <a:spAutoFit/>
-          </a:bodyPr>
-          <a:lstStyle/>
-          <a:p>
-            <a:pPr>
-              <a:defRPr sz="3000" b="1">
-                <a:solidFill>
-                  <a:srgbClr val="132334"/>
-                </a:solidFill>
-              </a:defRPr>
-            </a:pPr>
-            <a:r>
-              <a:t>Ruta de la charla</a:t>
-            </a:r>
-          </a:p>
-        </p:txBody>
-      </p:sp>
-      <p:sp>
-        <p:nvSpPr>
-          <p:cNvPr id="4" name="TextBox 3"/>
-          <p:cNvSpPr txBox="1"/>
-          <p:nvPr/>
-        </p:nvSpPr>
-        <p:spPr>
-          <a:xfrm>
-            <a:off x="621792" y="987552"/>
-            <a:ext cx="7772400" cy="731520"/>
-          </a:xfrm>
-          <a:prstGeom prst="rect">
-            <a:avLst/>
-          </a:prstGeom>
-          <a:noFill/>
-        </p:spPr>
-        <p:txBody>
-          <a:bodyPr wrap="none">
-            <a:spAutoFit/>
-          </a:bodyPr>
-          <a:lstStyle/>
-          <a:p>
-            <a:pPr>
-              <a:defRPr sz="1400">
-                <a:solidFill>
-                  <a:srgbClr val="606C79"/>
-                </a:solidFill>
-              </a:defRPr>
-            </a:pPr>
-            <a:r>
-              <a:t>30 min charla + 10 min demo + 5 min preguntas</a:t>
-            </a:r>
-          </a:p>
-        </p:txBody>
-      </p:sp>
-      <p:sp>
-        <p:nvSpPr>
-          <p:cNvPr id="5" name="TextBox 4"/>
-          <p:cNvSpPr txBox="1"/>
-          <p:nvPr/>
-        </p:nvSpPr>
-        <p:spPr>
-          <a:xfrm>
-            <a:off x="713232" y="1600200"/>
-            <a:ext cx="6629400" cy="4480560"/>
-          </a:xfrm>
-          <a:prstGeom prst="rect">
-            <a:avLst/>
-          </a:prstGeom>
-          <a:noFill/>
-        </p:spPr>
-        <p:txBody>
-          <a:bodyPr wrap="none">
-            <a:spAutoFit/>
-          </a:bodyPr>
-          <a:lstStyle/>
-          <a:p>
-            <a:pPr>
-              <a:spcAft>
-                <a:spcPts val="1200"/>
-              </a:spcAft>
-              <a:defRPr sz="2100">
-                <a:solidFill>
-                  <a:srgbClr val="242C36"/>
-                </a:solidFill>
-              </a:defRPr>
-            </a:pPr>
-            <a:r>
-              <a:t>• Bloque 1 (10 min): desafíos reales de construcción y real estate en Guayaquil.</a:t>
-            </a:r>
-          </a:p>
-          <a:p>
-            <a:pPr>
-              <a:spcAft>
-                <a:spcPts val="1200"/>
-              </a:spcAft>
-              <a:defRPr sz="1900">
-                <a:solidFill>
-                  <a:srgbClr val="242C36"/>
-                </a:solidFill>
-              </a:defRPr>
-            </a:pPr>
-            <a:r>
-              <a:t>• Bloque 2 (10 min): capa digital, datos operativos e IA aplicada.</a:t>
-            </a:r>
-          </a:p>
-          <a:p>
-            <a:pPr>
-              <a:spcAft>
-                <a:spcPts val="1200"/>
-              </a:spcAft>
-              <a:defRPr sz="1900">
-                <a:solidFill>
-                  <a:srgbClr val="242C36"/>
-                </a:solidFill>
-              </a:defRPr>
-            </a:pPr>
-            <a:r>
-              <a:t>• Bloque 3 (10 min): caso Torre Santiago, decisiones y plan de adopción.</a:t>
-            </a:r>
-          </a:p>
-          <a:p>
-            <a:pPr>
-              <a:spcAft>
-                <a:spcPts val="1200"/>
-              </a:spcAft>
-              <a:defRPr sz="1900">
-                <a:solidFill>
-                  <a:srgbClr val="242C36"/>
-                </a:solidFill>
-              </a:defRPr>
-            </a:pPr>
-            <a:r>
-              <a:t>• Demo (10 min): tablero + alerta predictiva + recomendación accionable.</a:t>
-            </a:r>
-          </a:p>
-          <a:p>
-            <a:pPr>
-              <a:spcAft>
-                <a:spcPts val="1200"/>
-              </a:spcAft>
-              <a:defRPr sz="1900">
-                <a:solidFill>
-                  <a:srgbClr val="242C36"/>
-                </a:solidFill>
-              </a:defRPr>
-            </a:pPr>
-            <a:r>
-              <a:t>• Q&amp;A (5 min): cómo arrancar en universidad y en empresa este año.</a:t>
-            </a:r>
-          </a:p>
-        </p:txBody>
-      </p:sp>
-      <p:pic>
-        <p:nvPicPr>
-          <p:cNvPr id="6" name="Picture 5" descr="context.png"/>
-          <p:cNvPicPr>
-            <a:picLocks noChangeAspect="1"/>
-          </p:cNvPicPr>
-          <p:nvPr/>
-        </p:nvPicPr>
-        <p:blipFill>
-          <a:blip r:embed="rId2"/>
-          <a:stretch>
-            <a:fillRect/>
-          </a:stretch>
-        </p:blipFill>
-        <p:spPr>
-          <a:xfrm>
-            <a:off x="7543800" y="1325880"/>
-            <a:ext cx="4160520" cy="4800600"/>
-          </a:xfrm>
-          <a:prstGeom prst="rect">
-            <a:avLst/>
-          </a:prstGeom>
-        </p:spPr>
-      </p:pic>
-      <p:sp>
-        <p:nvSpPr>
-          <p:cNvPr id="7" name="Rectangle 6"/>
-          <p:cNvSpPr/>
-          <p:nvPr/>
-        </p:nvSpPr>
-        <p:spPr>
-          <a:xfrm>
-            <a:off x="594360" y="6446520"/>
-            <a:ext cx="11018520" cy="18288"/>
-          </a:xfrm>
-          <a:prstGeom prst="rect">
-            <a:avLst/>
-          </a:prstGeom>
-          <a:solidFill>
-            <a:srgbClr val="008D96"/>
-          </a:solidFill>
-          <a:ln>
-            <a:noFill/>
-          </a:ln>
-        </p:spPr>
-        <p:style>
-          <a:lnRef idx="1">
-            <a:schemeClr val="accent1"/>
-          </a:lnRef>
-          <a:fillRef idx="3">
-            <a:schemeClr val="accent1"/>
-          </a:fillRef>
-          <a:effectRef idx="2">
-            <a:schemeClr val="accent1"/>
-          </a:effectRef>
-          <a:fontRef idx="minor">
-            <a:schemeClr val="lt1"/>
-          </a:fontRef>
-        </p:style>
-        <p:txBody>
-          <a:bodyPr rtlCol="0" anchor="ctr"/>
-          <a:lstStyle/>
-          <a:p>
-            <a:pPr algn="ctr"/>
-          </a:p>
-        </p:txBody>
-      </p:sp>
-      <p:sp>
-        <p:nvSpPr>
-          <p:cNvPr id="8" name="TextBox 7"/>
-          <p:cNvSpPr txBox="1"/>
-          <p:nvPr/>
-        </p:nvSpPr>
-        <p:spPr>
-          <a:xfrm>
-            <a:off x="10698480" y="6492240"/>
-            <a:ext cx="731520" cy="274320"/>
-          </a:xfrm>
-          <a:prstGeom prst="rect">
-            <a:avLst/>
-          </a:prstGeom>
-          <a:noFill/>
-        </p:spPr>
-        <p:txBody>
-          <a:bodyPr wrap="none">
-            <a:spAutoFit/>
-          </a:bodyPr>
-          <a:lstStyle/>
-          <a:p>
-            <a:pPr algn="r">
-              <a:defRPr sz="900">
-                <a:solidFill>
-                  <a:srgbClr val="606C79"/>
-                </a:solidFill>
-              </a:defRPr>
-            </a:pPr>
-            <a:r>
-              <a:t>02</a:t>
-            </a:r>
-          </a:p>
-        </p:txBody>
-      </p:sp>
-    </p:spTree>
-  </p:cSld>
-  <p:clrMapOvr>
-    <a:masterClrMapping/>
-  </p:clrMapOvr>
-</p:sld>
-</file>
-
-<file path=ppt/slides/slide3.xml><?xml version="1.0" encoding="utf-8"?>
-<p:sld xmlns:a="http://schemas.openxmlformats.org/drawingml/2006/main" xmlns:p="http://schemas.openxmlformats.org/presentationml/2006/main" xmlns:r="http://schemas.openxmlformats.org/officeDocument/2006/relationships">
-  <p:cSld>
-    <p:spTree>
-      <p:nvGrpSpPr>
-        <p:cNvPr id="1" name=""/>
-        <p:cNvGrpSpPr/>
-        <p:nvPr/>
-      </p:nvGrpSpPr>
-      <p:grpSpPr/>
-      <p:sp>
-        <p:nvSpPr>
-          <p:cNvPr id="2" name="Rectangle 1"/>
-          <p:cNvSpPr/>
-          <p:nvPr/>
-        </p:nvSpPr>
-        <p:spPr>
-          <a:xfrm>
-            <a:off x="0" y="0"/>
-            <a:ext cx="12191695" cy="6858000"/>
-          </a:xfrm>
-          <a:prstGeom prst="rect">
-            <a:avLst/>
-          </a:prstGeom>
-          <a:solidFill>
-            <a:srgbClr val="F6F8FA"/>
-          </a:solidFill>
-          <a:ln>
-            <a:noFill/>
-          </a:ln>
-        </p:spPr>
-        <p:style>
-          <a:lnRef idx="1">
-            <a:schemeClr val="accent1"/>
-          </a:lnRef>
-          <a:fillRef idx="3">
-            <a:schemeClr val="accent1"/>
-          </a:fillRef>
-          <a:effectRef idx="2">
-            <a:schemeClr val="accent1"/>
-          </a:effectRef>
-          <a:fontRef idx="minor">
-            <a:schemeClr val="lt1"/>
-          </a:fontRef>
-        </p:style>
-        <p:txBody>
-          <a:bodyPr rtlCol="0" anchor="ctr"/>
-          <a:lstStyle/>
-          <a:p>
-            <a:pPr algn="ctr"/>
-          </a:p>
-        </p:txBody>
-      </p:sp>
-      <p:sp>
-        <p:nvSpPr>
-          <p:cNvPr id="3" name="TextBox 2"/>
-          <p:cNvSpPr txBox="1"/>
-          <p:nvPr/>
-        </p:nvSpPr>
-        <p:spPr>
-          <a:xfrm>
-            <a:off x="594360" y="347472"/>
-            <a:ext cx="7680960" cy="1097280"/>
-          </a:xfrm>
-          <a:prstGeom prst="rect">
-            <a:avLst/>
-          </a:prstGeom>
-          <a:noFill/>
-        </p:spPr>
-        <p:txBody>
-          <a:bodyPr wrap="none">
-            <a:spAutoFit/>
-          </a:bodyPr>
-          <a:lstStyle/>
-          <a:p>
-            <a:pPr>
-              <a:defRPr sz="3000" b="1">
-                <a:solidFill>
-                  <a:srgbClr val="132334"/>
-                </a:solidFill>
-              </a:defRPr>
-            </a:pPr>
-            <a:r>
-              <a:t>Guayaquil hoy: presión por ejecutar mejor</a:t>
-            </a:r>
-          </a:p>
-        </p:txBody>
-      </p:sp>
-      <p:sp>
-        <p:nvSpPr>
-          <p:cNvPr id="4" name="TextBox 3"/>
-          <p:cNvSpPr txBox="1"/>
-          <p:nvPr/>
-        </p:nvSpPr>
-        <p:spPr>
-          <a:xfrm>
-            <a:off x="621792" y="987552"/>
-            <a:ext cx="7772400" cy="731520"/>
-          </a:xfrm>
-          <a:prstGeom prst="rect">
-            <a:avLst/>
-          </a:prstGeom>
-          <a:noFill/>
-        </p:spPr>
-        <p:txBody>
-          <a:bodyPr wrap="none">
-            <a:spAutoFit/>
-          </a:bodyPr>
-          <a:lstStyle/>
-          <a:p>
-            <a:pPr>
-              <a:defRPr sz="1400">
-                <a:solidFill>
-                  <a:srgbClr val="606C79"/>
-                </a:solidFill>
-              </a:defRPr>
-            </a:pPr>
-            <a:r>
-              <a:t>Más demanda, más escrutinio, menos margen para improvisar</a:t>
-            </a:r>
-          </a:p>
-        </p:txBody>
-      </p:sp>
-      <p:sp>
-        <p:nvSpPr>
-          <p:cNvPr id="5" name="TextBox 4"/>
-          <p:cNvSpPr txBox="1"/>
-          <p:nvPr/>
-        </p:nvSpPr>
-        <p:spPr>
-          <a:xfrm>
-            <a:off x="713232" y="1600200"/>
-            <a:ext cx="6629400" cy="4480560"/>
-          </a:xfrm>
-          <a:prstGeom prst="rect">
-            <a:avLst/>
-          </a:prstGeom>
-          <a:noFill/>
-        </p:spPr>
-        <p:txBody>
-          <a:bodyPr wrap="none">
-            <a:spAutoFit/>
-          </a:bodyPr>
-          <a:lstStyle/>
-          <a:p>
-            <a:pPr>
-              <a:spcAft>
-                <a:spcPts val="1200"/>
-              </a:spcAft>
-              <a:defRPr sz="2100">
-                <a:solidFill>
-                  <a:srgbClr val="242C36"/>
-                </a:solidFill>
-              </a:defRPr>
-            </a:pPr>
-            <a:r>
-              <a:t>• El mercado exige plazos confiables para proyectos residenciales, mixtos y logísticos.</a:t>
-            </a:r>
-          </a:p>
-          <a:p>
-            <a:pPr>
-              <a:spcAft>
-                <a:spcPts val="1200"/>
-              </a:spcAft>
-              <a:defRPr sz="1900">
-                <a:solidFill>
-                  <a:srgbClr val="242C36"/>
-                </a:solidFill>
-              </a:defRPr>
-            </a:pPr>
-            <a:r>
-              <a:t>• Los sobrecostos impactan rentabilidad del desarrollador y flujo del contratista.</a:t>
-            </a:r>
-          </a:p>
-          <a:p>
-            <a:pPr>
-              <a:spcAft>
-                <a:spcPts val="1200"/>
-              </a:spcAft>
-              <a:defRPr sz="1900">
-                <a:solidFill>
-                  <a:srgbClr val="242C36"/>
-                </a:solidFill>
-              </a:defRPr>
-            </a:pPr>
-            <a:r>
-              <a:t>• Proveedores necesitan previsibilidad de compras para no romper cadena de suministro.</a:t>
-            </a:r>
-          </a:p>
-          <a:p>
-            <a:pPr>
-              <a:spcAft>
-                <a:spcPts val="1200"/>
-              </a:spcAft>
-              <a:defRPr sz="1900">
-                <a:solidFill>
-                  <a:srgbClr val="242C36"/>
-                </a:solidFill>
-              </a:defRPr>
-            </a:pPr>
-            <a:r>
-              <a:t>• La coordinación entre diseño, obra y comercial sigue siendo un cuello de botella.</a:t>
-            </a:r>
-          </a:p>
-          <a:p>
-            <a:pPr>
-              <a:spcAft>
-                <a:spcPts val="1200"/>
-              </a:spcAft>
-              <a:defRPr sz="1900">
-                <a:solidFill>
-                  <a:srgbClr val="242C36"/>
-                </a:solidFill>
-              </a:defRPr>
-            </a:pPr>
-            <a:r>
-              <a:t>• Resultado: quien controla datos y decisiones, controla el negocio.</a:t>
-            </a:r>
-          </a:p>
-        </p:txBody>
-      </p:sp>
-      <p:pic>
-        <p:nvPicPr>
-          <p:cNvPr id="6" name="Picture 5" descr="context.png"/>
-          <p:cNvPicPr>
-            <a:picLocks noChangeAspect="1"/>
-          </p:cNvPicPr>
-          <p:nvPr/>
-        </p:nvPicPr>
-        <p:blipFill>
-          <a:blip r:embed="rId2"/>
-          <a:stretch>
-            <a:fillRect/>
-          </a:stretch>
-        </p:blipFill>
-        <p:spPr>
-          <a:xfrm>
-            <a:off x="7543800" y="1325880"/>
-            <a:ext cx="4160520" cy="4800600"/>
-          </a:xfrm>
-          <a:prstGeom prst="rect">
-            <a:avLst/>
-          </a:prstGeom>
-        </p:spPr>
-      </p:pic>
-      <p:sp>
-        <p:nvSpPr>
-          <p:cNvPr id="7" name="Rectangle 6"/>
-          <p:cNvSpPr/>
-          <p:nvPr/>
-        </p:nvSpPr>
-        <p:spPr>
-          <a:xfrm>
-            <a:off x="594360" y="6446520"/>
-            <a:ext cx="11018520" cy="18288"/>
-          </a:xfrm>
-          <a:prstGeom prst="rect">
-            <a:avLst/>
-          </a:prstGeom>
-          <a:solidFill>
-            <a:srgbClr val="008D96"/>
-          </a:solidFill>
-          <a:ln>
-            <a:noFill/>
-          </a:ln>
-        </p:spPr>
-        <p:style>
-          <a:lnRef idx="1">
-            <a:schemeClr val="accent1"/>
-          </a:lnRef>
-          <a:fillRef idx="3">
-            <a:schemeClr val="accent1"/>
-          </a:fillRef>
-          <a:effectRef idx="2">
-            <a:schemeClr val="accent1"/>
-          </a:effectRef>
-          <a:fontRef idx="minor">
-            <a:schemeClr val="lt1"/>
-          </a:fontRef>
-        </p:style>
-        <p:txBody>
-          <a:bodyPr rtlCol="0" anchor="ctr"/>
-          <a:lstStyle/>
-          <a:p>
-            <a:pPr algn="ctr"/>
-          </a:p>
-        </p:txBody>
-      </p:sp>
-      <p:sp>
-        <p:nvSpPr>
-          <p:cNvPr id="8" name="TextBox 7"/>
-          <p:cNvSpPr txBox="1"/>
-          <p:nvPr/>
-        </p:nvSpPr>
-        <p:spPr>
-          <a:xfrm>
-            <a:off x="10698480" y="6492240"/>
-            <a:ext cx="731520" cy="274320"/>
-          </a:xfrm>
-          <a:prstGeom prst="rect">
-            <a:avLst/>
-          </a:prstGeom>
-          <a:noFill/>
-        </p:spPr>
-        <p:txBody>
-          <a:bodyPr wrap="none">
-            <a:spAutoFit/>
-          </a:bodyPr>
-          <a:lstStyle/>
-          <a:p>
-            <a:pPr algn="r">
-              <a:defRPr sz="900">
-                <a:solidFill>
-                  <a:srgbClr val="606C79"/>
-                </a:solidFill>
-              </a:defRPr>
-            </a:pPr>
-            <a:r>
-              <a:t>03</a:t>
-            </a:r>
-          </a:p>
-        </p:txBody>
-      </p:sp>
-    </p:spTree>
-  </p:cSld>
-  <p:clrMapOvr>
-    <a:masterClrMapping/>
-  </p:clrMapOvr>
-</p:sld>
-</file>
-
-<file path=ppt/slides/slide4.xml><?xml version="1.0" encoding="utf-8"?>
-<p:sld xmlns:a="http://schemas.openxmlformats.org/drawingml/2006/main" xmlns:p="http://schemas.openxmlformats.org/presentationml/2006/main" xmlns:r="http://schemas.openxmlformats.org/officeDocument/2006/relationships">
-  <p:cSld>
-    <p:spTree>
-      <p:nvGrpSpPr>
-        <p:cNvPr id="1" name=""/>
-        <p:cNvGrpSpPr/>
-        <p:nvPr/>
-      </p:nvGrpSpPr>
-      <p:grpSpPr/>
-      <p:sp>
-        <p:nvSpPr>
-          <p:cNvPr id="2" name="Rectangle 1"/>
-          <p:cNvSpPr/>
-          <p:nvPr/>
-        </p:nvSpPr>
-        <p:spPr>
-          <a:xfrm>
-            <a:off x="0" y="0"/>
-            <a:ext cx="12191695" cy="6858000"/>
-          </a:xfrm>
-          <a:prstGeom prst="rect">
-            <a:avLst/>
-          </a:prstGeom>
-          <a:solidFill>
-            <a:srgbClr val="F6F8FA"/>
-          </a:solidFill>
-          <a:ln>
-            <a:noFill/>
-          </a:ln>
-        </p:spPr>
-        <p:style>
-          <a:lnRef idx="1">
-            <a:schemeClr val="accent1"/>
-          </a:lnRef>
-          <a:fillRef idx="3">
-            <a:schemeClr val="accent1"/>
-          </a:fillRef>
-          <a:effectRef idx="2">
-            <a:schemeClr val="accent1"/>
-          </a:effectRef>
-          <a:fontRef idx="minor">
-            <a:schemeClr val="lt1"/>
-          </a:fontRef>
-        </p:style>
-        <p:txBody>
-          <a:bodyPr rtlCol="0" anchor="ctr"/>
-          <a:lstStyle/>
-          <a:p>
-            <a:pPr algn="ctr"/>
-          </a:p>
-        </p:txBody>
-      </p:sp>
-      <p:sp>
-        <p:nvSpPr>
-          <p:cNvPr id="3" name="TextBox 2"/>
-          <p:cNvSpPr txBox="1"/>
-          <p:nvPr/>
-        </p:nvSpPr>
-        <p:spPr>
-          <a:xfrm>
-            <a:off x="594360" y="347472"/>
-            <a:ext cx="7680960" cy="1097280"/>
-          </a:xfrm>
-          <a:prstGeom prst="rect">
-            <a:avLst/>
-          </a:prstGeom>
-          <a:noFill/>
-        </p:spPr>
-        <p:txBody>
-          <a:bodyPr wrap="none">
-            <a:spAutoFit/>
-          </a:bodyPr>
-          <a:lstStyle/>
-          <a:p>
-            <a:pPr>
-              <a:defRPr sz="3000" b="1">
-                <a:solidFill>
-                  <a:srgbClr val="132334"/>
-                </a:solidFill>
-              </a:defRPr>
-            </a:pPr>
-            <a:r>
-              <a:t>El costo oculto de la fragmentación</a:t>
-            </a:r>
-          </a:p>
-        </p:txBody>
-      </p:sp>
-      <p:sp>
-        <p:nvSpPr>
-          <p:cNvPr id="4" name="TextBox 3"/>
-          <p:cNvSpPr txBox="1"/>
-          <p:nvPr/>
-        </p:nvSpPr>
-        <p:spPr>
-          <a:xfrm>
-            <a:off x="621792" y="987552"/>
-            <a:ext cx="7772400" cy="731520"/>
-          </a:xfrm>
-          <a:prstGeom prst="rect">
-            <a:avLst/>
-          </a:prstGeom>
-          <a:noFill/>
-        </p:spPr>
-        <p:txBody>
-          <a:bodyPr wrap="none">
-            <a:spAutoFit/>
-          </a:bodyPr>
-          <a:lstStyle/>
-          <a:p>
-            <a:pPr>
-              <a:defRPr sz="1400">
-                <a:solidFill>
-                  <a:srgbClr val="606C79"/>
-                </a:solidFill>
-              </a:defRPr>
-            </a:pPr>
-            <a:r>
-              <a:t>Tenemos datos, pero dispersos en múltiples silos</a:t>
-            </a:r>
-          </a:p>
-        </p:txBody>
-      </p:sp>
-      <p:sp>
-        <p:nvSpPr>
-          <p:cNvPr id="5" name="TextBox 4"/>
-          <p:cNvSpPr txBox="1"/>
-          <p:nvPr/>
-        </p:nvSpPr>
-        <p:spPr>
-          <a:xfrm>
-            <a:off x="713232" y="1600200"/>
-            <a:ext cx="6629400" cy="4480560"/>
-          </a:xfrm>
-          <a:prstGeom prst="rect">
-            <a:avLst/>
-          </a:prstGeom>
-          <a:noFill/>
-        </p:spPr>
-        <p:txBody>
-          <a:bodyPr wrap="none">
-            <a:spAutoFit/>
-          </a:bodyPr>
-          <a:lstStyle/>
-          <a:p>
-            <a:pPr>
-              <a:spcAft>
-                <a:spcPts val="1200"/>
-              </a:spcAft>
-              <a:defRPr sz="2100">
-                <a:solidFill>
-                  <a:srgbClr val="242C36"/>
-                </a:solidFill>
-              </a:defRPr>
-            </a:pPr>
-            <a:r>
-              <a:t>• Cronograma vive en un archivo; avance real, en fotos y chats.</a:t>
-            </a:r>
-          </a:p>
-          <a:p>
-            <a:pPr>
-              <a:spcAft>
-                <a:spcPts val="1200"/>
-              </a:spcAft>
-              <a:defRPr sz="1900">
-                <a:solidFill>
-                  <a:srgbClr val="242C36"/>
-                </a:solidFill>
-              </a:defRPr>
-            </a:pPr>
-            <a:r>
-              <a:t>• Costos y compras se analizan tarde, cuando el desvío ya ocurrió.</a:t>
-            </a:r>
-          </a:p>
-          <a:p>
-            <a:pPr>
-              <a:spcAft>
-                <a:spcPts val="1200"/>
-              </a:spcAft>
-              <a:defRPr sz="1900">
-                <a:solidFill>
-                  <a:srgbClr val="242C36"/>
-                </a:solidFill>
-              </a:defRPr>
-            </a:pPr>
-            <a:r>
-              <a:t>• Riesgos de seguridad se reportan sin trazabilidad comparativa.</a:t>
-            </a:r>
-          </a:p>
-          <a:p>
-            <a:pPr>
-              <a:spcAft>
-                <a:spcPts val="1200"/>
-              </a:spcAft>
-              <a:defRPr sz="1900">
-                <a:solidFill>
-                  <a:srgbClr val="242C36"/>
-                </a:solidFill>
-              </a:defRPr>
-            </a:pPr>
-            <a:r>
-              <a:t>• Dirección recibe reportes semanales, no señales tempranas diarias.</a:t>
-            </a:r>
-          </a:p>
-          <a:p>
-            <a:pPr>
-              <a:spcAft>
-                <a:spcPts val="1200"/>
-              </a:spcAft>
-              <a:defRPr sz="1900">
-                <a:solidFill>
-                  <a:srgbClr val="242C36"/>
-                </a:solidFill>
-              </a:defRPr>
-            </a:pPr>
-            <a:r>
-              <a:t>• Sin integración, reaccionamos tarde y pagamos más.</a:t>
-            </a:r>
-          </a:p>
-        </p:txBody>
-      </p:sp>
-      <p:pic>
-        <p:nvPicPr>
-          <p:cNvPr id="6" name="Picture 5" descr="stack.png"/>
-          <p:cNvPicPr>
-            <a:picLocks noChangeAspect="1"/>
-          </p:cNvPicPr>
-          <p:nvPr/>
-        </p:nvPicPr>
-        <p:blipFill>
-          <a:blip r:embed="rId2"/>
-          <a:stretch>
-            <a:fillRect/>
-          </a:stretch>
-        </p:blipFill>
-        <p:spPr>
-          <a:xfrm>
-            <a:off x="7543800" y="1325880"/>
-            <a:ext cx="4160520" cy="4800600"/>
-          </a:xfrm>
-          <a:prstGeom prst="rect">
-            <a:avLst/>
-          </a:prstGeom>
-        </p:spPr>
-      </p:pic>
-      <p:sp>
-        <p:nvSpPr>
-          <p:cNvPr id="7" name="Rectangle 6"/>
-          <p:cNvSpPr/>
-          <p:nvPr/>
-        </p:nvSpPr>
-        <p:spPr>
-          <a:xfrm>
-            <a:off x="594360" y="6446520"/>
-            <a:ext cx="11018520" cy="18288"/>
-          </a:xfrm>
-          <a:prstGeom prst="rect">
-            <a:avLst/>
-          </a:prstGeom>
-          <a:solidFill>
-            <a:srgbClr val="008D96"/>
-          </a:solidFill>
-          <a:ln>
-            <a:noFill/>
-          </a:ln>
-        </p:spPr>
-        <p:style>
-          <a:lnRef idx="1">
-            <a:schemeClr val="accent1"/>
-          </a:lnRef>
-          <a:fillRef idx="3">
-            <a:schemeClr val="accent1"/>
-          </a:fillRef>
-          <a:effectRef idx="2">
-            <a:schemeClr val="accent1"/>
-          </a:effectRef>
-          <a:fontRef idx="minor">
-            <a:schemeClr val="lt1"/>
-          </a:fontRef>
-        </p:style>
-        <p:txBody>
-          <a:bodyPr rtlCol="0" anchor="ctr"/>
-          <a:lstStyle/>
-          <a:p>
-            <a:pPr algn="ctr"/>
-          </a:p>
-        </p:txBody>
-      </p:sp>
-      <p:sp>
-        <p:nvSpPr>
-          <p:cNvPr id="8" name="TextBox 7"/>
-          <p:cNvSpPr txBox="1"/>
-          <p:nvPr/>
-        </p:nvSpPr>
-        <p:spPr>
-          <a:xfrm>
-            <a:off x="10698480" y="6492240"/>
-            <a:ext cx="731520" cy="274320"/>
-          </a:xfrm>
-          <a:prstGeom prst="rect">
-            <a:avLst/>
-          </a:prstGeom>
-          <a:noFill/>
-        </p:spPr>
-        <p:txBody>
-          <a:bodyPr wrap="none">
-            <a:spAutoFit/>
-          </a:bodyPr>
-          <a:lstStyle/>
-          <a:p>
-            <a:pPr algn="r">
-              <a:defRPr sz="900">
-                <a:solidFill>
-                  <a:srgbClr val="606C79"/>
-                </a:solidFill>
-              </a:defRPr>
-            </a:pPr>
-            <a:r>
-              <a:t>04</a:t>
-            </a:r>
-          </a:p>
-        </p:txBody>
-      </p:sp>
-    </p:spTree>
-  </p:cSld>
-  <p:clrMapOvr>
-    <a:masterClrMapping/>
-  </p:clrMapOvr>
-</p:sld>
-</file>
-
-<file path=ppt/slides/slide5.xml><?xml version="1.0" encoding="utf-8"?>
-<p:sld xmlns:a="http://schemas.openxmlformats.org/drawingml/2006/main" xmlns:p="http://schemas.openxmlformats.org/presentationml/2006/main" xmlns:r="http://schemas.openxmlformats.org/officeDocument/2006/relationships">
-  <p:cSld>
-    <p:spTree>
-      <p:nvGrpSpPr>
-        <p:cNvPr id="1" name=""/>
-        <p:cNvGrpSpPr/>
-        <p:nvPr/>
-      </p:nvGrpSpPr>
-      <p:grpSpPr/>
-      <p:sp>
-        <p:nvSpPr>
-          <p:cNvPr id="2" name="Rectangle 1"/>
-          <p:cNvSpPr/>
-          <p:nvPr/>
-        </p:nvSpPr>
-        <p:spPr>
-          <a:xfrm>
-            <a:off x="0" y="0"/>
-            <a:ext cx="12191695" cy="6858000"/>
-          </a:xfrm>
-          <a:prstGeom prst="rect">
-            <a:avLst/>
-          </a:prstGeom>
-          <a:solidFill>
-            <a:srgbClr val="F6F8FA"/>
-          </a:solidFill>
-          <a:ln>
-            <a:noFill/>
-          </a:ln>
-        </p:spPr>
-        <p:style>
-          <a:lnRef idx="1">
-            <a:schemeClr val="accent1"/>
-          </a:lnRef>
-          <a:fillRef idx="3">
-            <a:schemeClr val="accent1"/>
-          </a:fillRef>
-          <a:effectRef idx="2">
-            <a:schemeClr val="accent1"/>
-          </a:effectRef>
-          <a:fontRef idx="minor">
-            <a:schemeClr val="lt1"/>
-          </a:fontRef>
-        </p:style>
-        <p:txBody>
-          <a:bodyPr rtlCol="0" anchor="ctr"/>
-          <a:lstStyle/>
-          <a:p>
-            <a:pPr algn="ctr"/>
-          </a:p>
-        </p:txBody>
-      </p:sp>
-      <p:sp>
-        <p:nvSpPr>
-          <p:cNvPr id="3" name="TextBox 2"/>
-          <p:cNvSpPr txBox="1"/>
-          <p:nvPr/>
-        </p:nvSpPr>
-        <p:spPr>
-          <a:xfrm>
-            <a:off x="594360" y="347472"/>
-            <a:ext cx="7680960" cy="1097280"/>
-          </a:xfrm>
-          <a:prstGeom prst="rect">
-            <a:avLst/>
-          </a:prstGeom>
-          <a:noFill/>
-        </p:spPr>
-        <p:txBody>
-          <a:bodyPr wrap="none">
-            <a:spAutoFit/>
-          </a:bodyPr>
-          <a:lstStyle/>
-          <a:p>
-            <a:pPr>
-              <a:defRPr sz="3000" b="1">
-                <a:solidFill>
-                  <a:srgbClr val="132334"/>
-                </a:solidFill>
-              </a:defRPr>
-            </a:pPr>
-            <a:r>
-              <a:t>Qué llamamos ‘capa digital’</a:t>
-            </a:r>
-          </a:p>
-        </p:txBody>
-      </p:sp>
-      <p:sp>
-        <p:nvSpPr>
-          <p:cNvPr id="4" name="TextBox 3"/>
-          <p:cNvSpPr txBox="1"/>
-          <p:nvPr/>
-        </p:nvSpPr>
-        <p:spPr>
-          <a:xfrm>
-            <a:off x="621792" y="987552"/>
-            <a:ext cx="7772400" cy="731520"/>
-          </a:xfrm>
-          <a:prstGeom prst="rect">
-            <a:avLst/>
-          </a:prstGeom>
-          <a:noFill/>
-        </p:spPr>
-        <p:txBody>
-          <a:bodyPr wrap="none">
-            <a:spAutoFit/>
-          </a:bodyPr>
-          <a:lstStyle/>
-          <a:p>
-            <a:pPr>
-              <a:defRPr sz="1400">
-                <a:solidFill>
-                  <a:srgbClr val="606C79"/>
-                </a:solidFill>
-              </a:defRPr>
-            </a:pPr>
-            <a:r>
-              <a:t>Un sistema para pasar de dato suelto a decisión de obra</a:t>
-            </a:r>
-          </a:p>
-        </p:txBody>
-      </p:sp>
-      <p:sp>
-        <p:nvSpPr>
-          <p:cNvPr id="5" name="TextBox 4"/>
-          <p:cNvSpPr txBox="1"/>
-          <p:nvPr/>
-        </p:nvSpPr>
-        <p:spPr>
-          <a:xfrm>
-            <a:off x="713232" y="1600200"/>
-            <a:ext cx="6629400" cy="4480560"/>
-          </a:xfrm>
-          <a:prstGeom prst="rect">
-            <a:avLst/>
-          </a:prstGeom>
-          <a:noFill/>
-        </p:spPr>
-        <p:txBody>
-          <a:bodyPr wrap="none">
-            <a:spAutoFit/>
-          </a:bodyPr>
-          <a:lstStyle/>
-          <a:p>
-            <a:pPr>
-              <a:spcAft>
-                <a:spcPts val="1200"/>
-              </a:spcAft>
-              <a:defRPr sz="2100">
-                <a:solidFill>
-                  <a:srgbClr val="242C36"/>
-                </a:solidFill>
-              </a:defRPr>
-            </a:pPr>
-            <a:r>
-              <a:t>• Captura: maquinaria, partes diarios, BIM, clima, fotos de campo.</a:t>
-            </a:r>
-          </a:p>
-          <a:p>
-            <a:pPr>
-              <a:spcAft>
-                <a:spcPts val="1200"/>
-              </a:spcAft>
-              <a:defRPr sz="1900">
-                <a:solidFill>
-                  <a:srgbClr val="242C36"/>
-                </a:solidFill>
-              </a:defRPr>
-            </a:pPr>
-            <a:r>
-              <a:t>• Integración: un modelo de datos común por frente, actividad y costo.</a:t>
-            </a:r>
-          </a:p>
-          <a:p>
-            <a:pPr>
-              <a:spcAft>
-                <a:spcPts val="1200"/>
-              </a:spcAft>
-              <a:defRPr sz="1900">
-                <a:solidFill>
-                  <a:srgbClr val="242C36"/>
-                </a:solidFill>
-              </a:defRPr>
-            </a:pPr>
-            <a:r>
-              <a:t>• Analítica: indicadores de productividad, seguridad, avance y desvío.</a:t>
-            </a:r>
-          </a:p>
-          <a:p>
-            <a:pPr>
-              <a:spcAft>
-                <a:spcPts val="1200"/>
-              </a:spcAft>
-              <a:defRPr sz="1900">
-                <a:solidFill>
-                  <a:srgbClr val="242C36"/>
-                </a:solidFill>
-              </a:defRPr>
-            </a:pPr>
-            <a:r>
-              <a:t>• IA: alertas predictivas y explicación de causas probables.</a:t>
-            </a:r>
-          </a:p>
-          <a:p>
-            <a:pPr>
-              <a:spcAft>
-                <a:spcPts val="1200"/>
-              </a:spcAft>
-              <a:defRPr sz="1900">
-                <a:solidFill>
-                  <a:srgbClr val="242C36"/>
-                </a:solidFill>
-              </a:defRPr>
-            </a:pPr>
-            <a:r>
-              <a:t>• Acción: reunión de control con decisiones trazables y responsables.</a:t>
-            </a:r>
-          </a:p>
-        </p:txBody>
-      </p:sp>
-      <p:pic>
-        <p:nvPicPr>
-          <p:cNvPr id="6" name="Picture 5" descr="stack.png"/>
-          <p:cNvPicPr>
-            <a:picLocks noChangeAspect="1"/>
-          </p:cNvPicPr>
-          <p:nvPr/>
-        </p:nvPicPr>
-        <p:blipFill>
-          <a:blip r:embed="rId2"/>
-          <a:stretch>
-            <a:fillRect/>
-          </a:stretch>
-        </p:blipFill>
-        <p:spPr>
-          <a:xfrm>
-            <a:off x="7543800" y="1325880"/>
-            <a:ext cx="4160520" cy="4800600"/>
-          </a:xfrm>
-          <a:prstGeom prst="rect">
-            <a:avLst/>
-          </a:prstGeom>
-        </p:spPr>
-      </p:pic>
-      <p:sp>
-        <p:nvSpPr>
-          <p:cNvPr id="7" name="Rectangle 6"/>
-          <p:cNvSpPr/>
-          <p:nvPr/>
-        </p:nvSpPr>
-        <p:spPr>
-          <a:xfrm>
-            <a:off x="594360" y="6446520"/>
-            <a:ext cx="11018520" cy="18288"/>
-          </a:xfrm>
-          <a:prstGeom prst="rect">
-            <a:avLst/>
-          </a:prstGeom>
-          <a:solidFill>
-            <a:srgbClr val="008D96"/>
-          </a:solidFill>
-          <a:ln>
-            <a:noFill/>
-          </a:ln>
-        </p:spPr>
-        <p:style>
-          <a:lnRef idx="1">
-            <a:schemeClr val="accent1"/>
-          </a:lnRef>
-          <a:fillRef idx="3">
-            <a:schemeClr val="accent1"/>
-          </a:fillRef>
-          <a:effectRef idx="2">
-            <a:schemeClr val="accent1"/>
-          </a:effectRef>
-          <a:fontRef idx="minor">
-            <a:schemeClr val="lt1"/>
-          </a:fontRef>
-        </p:style>
-        <p:txBody>
-          <a:bodyPr rtlCol="0" anchor="ctr"/>
-          <a:lstStyle/>
-          <a:p>
-            <a:pPr algn="ctr"/>
-          </a:p>
-        </p:txBody>
-      </p:sp>
-      <p:sp>
-        <p:nvSpPr>
-          <p:cNvPr id="8" name="TextBox 7"/>
-          <p:cNvSpPr txBox="1"/>
-          <p:nvPr/>
-        </p:nvSpPr>
-        <p:spPr>
-          <a:xfrm>
-            <a:off x="10698480" y="6492240"/>
-            <a:ext cx="731520" cy="274320"/>
-          </a:xfrm>
-          <a:prstGeom prst="rect">
-            <a:avLst/>
-          </a:prstGeom>
-          <a:noFill/>
-        </p:spPr>
-        <p:txBody>
-          <a:bodyPr wrap="none">
-            <a:spAutoFit/>
-          </a:bodyPr>
-          <a:lstStyle/>
-          <a:p>
-            <a:pPr algn="r">
-              <a:defRPr sz="900">
-                <a:solidFill>
-                  <a:srgbClr val="606C79"/>
-                </a:solidFill>
-              </a:defRPr>
-            </a:pPr>
-            <a:r>
-              <a:t>05</a:t>
-            </a:r>
-          </a:p>
-        </p:txBody>
-      </p:sp>
-    </p:spTree>
-  </p:cSld>
-  <p:clrMapOvr>
-    <a:masterClrMapping/>
-  </p:clrMapOvr>
-</p:sld>
-</file>
-
-<file path=ppt/slides/slide6.xml><?xml version="1.0" encoding="utf-8"?>
-<p:sld xmlns:a="http://schemas.openxmlformats.org/drawingml/2006/main" xmlns:p="http://schemas.openxmlformats.org/presentationml/2006/main" xmlns:r="http://schemas.openxmlformats.org/officeDocument/2006/relationships">
-  <p:cSld>
-    <p:spTree>
-      <p:nvGrpSpPr>
-        <p:cNvPr id="1" name=""/>
-        <p:cNvGrpSpPr/>
-        <p:nvPr/>
-      </p:nvGrpSpPr>
-      <p:grpSpPr/>
-      <p:sp>
-        <p:nvSpPr>
-          <p:cNvPr id="2" name="Rectangle 1"/>
-          <p:cNvSpPr/>
-          <p:nvPr/>
-        </p:nvSpPr>
-        <p:spPr>
-          <a:xfrm>
-            <a:off x="0" y="0"/>
-            <a:ext cx="12191695" cy="6858000"/>
-          </a:xfrm>
-          <a:prstGeom prst="rect">
-            <a:avLst/>
-          </a:prstGeom>
-          <a:solidFill>
-            <a:srgbClr val="F6F8FA"/>
-          </a:solidFill>
-          <a:ln>
-            <a:noFill/>
-          </a:ln>
-        </p:spPr>
-        <p:style>
-          <a:lnRef idx="1">
-            <a:schemeClr val="accent1"/>
-          </a:lnRef>
-          <a:fillRef idx="3">
-            <a:schemeClr val="accent1"/>
-          </a:fillRef>
-          <a:effectRef idx="2">
-            <a:schemeClr val="accent1"/>
-          </a:effectRef>
-          <a:fontRef idx="minor">
-            <a:schemeClr val="lt1"/>
-          </a:fontRef>
-        </p:style>
-        <p:txBody>
-          <a:bodyPr rtlCol="0" anchor="ctr"/>
-          <a:lstStyle/>
-          <a:p>
-            <a:pPr algn="ctr"/>
-          </a:p>
-        </p:txBody>
-      </p:sp>
-      <p:sp>
-        <p:nvSpPr>
-          <p:cNvPr id="3" name="TextBox 2"/>
-          <p:cNvSpPr txBox="1"/>
-          <p:nvPr/>
-        </p:nvSpPr>
-        <p:spPr>
-          <a:xfrm>
-            <a:off x="594360" y="347472"/>
-            <a:ext cx="7680960" cy="1097280"/>
-          </a:xfrm>
-          <a:prstGeom prst="rect">
-            <a:avLst/>
-          </a:prstGeom>
-          <a:noFill/>
-        </p:spPr>
-        <p:txBody>
-          <a:bodyPr wrap="none">
-            <a:spAutoFit/>
-          </a:bodyPr>
-          <a:lstStyle/>
-          <a:p>
-            <a:pPr>
-              <a:defRPr sz="3000" b="1">
-                <a:solidFill>
-                  <a:srgbClr val="132334"/>
-                </a:solidFill>
-              </a:defRPr>
-            </a:pPr>
-            <a:r>
-              <a:t>Valor para industria: ROI operativo</a:t>
-            </a:r>
-          </a:p>
-        </p:txBody>
-      </p:sp>
-      <p:sp>
-        <p:nvSpPr>
-          <p:cNvPr id="4" name="TextBox 3"/>
-          <p:cNvSpPr txBox="1"/>
-          <p:nvPr/>
-        </p:nvSpPr>
-        <p:spPr>
-          <a:xfrm>
-            <a:off x="621792" y="987552"/>
-            <a:ext cx="7772400" cy="731520"/>
-          </a:xfrm>
-          <a:prstGeom prst="rect">
-            <a:avLst/>
-          </a:prstGeom>
-          <a:noFill/>
-        </p:spPr>
-        <p:txBody>
-          <a:bodyPr wrap="none">
-            <a:spAutoFit/>
-          </a:bodyPr>
-          <a:lstStyle/>
-          <a:p>
-            <a:pPr>
-              <a:defRPr sz="1400">
-                <a:solidFill>
-                  <a:srgbClr val="606C79"/>
-                </a:solidFill>
-              </a:defRPr>
-            </a:pPr>
-            <a:r>
-              <a:t>Desarrolladores, contratistas y proveedores</a:t>
-            </a:r>
-          </a:p>
-        </p:txBody>
-      </p:sp>
-      <p:sp>
-        <p:nvSpPr>
-          <p:cNvPr id="5" name="TextBox 4"/>
-          <p:cNvSpPr txBox="1"/>
-          <p:nvPr/>
-        </p:nvSpPr>
-        <p:spPr>
-          <a:xfrm>
-            <a:off x="713232" y="1600200"/>
-            <a:ext cx="6629400" cy="4480560"/>
-          </a:xfrm>
-          <a:prstGeom prst="rect">
-            <a:avLst/>
-          </a:prstGeom>
-          <a:noFill/>
-        </p:spPr>
-        <p:txBody>
-          <a:bodyPr wrap="none">
-            <a:spAutoFit/>
-          </a:bodyPr>
-          <a:lstStyle/>
-          <a:p>
-            <a:pPr>
-              <a:spcAft>
-                <a:spcPts val="1200"/>
-              </a:spcAft>
-              <a:defRPr sz="2100">
-                <a:solidFill>
-                  <a:srgbClr val="242C36"/>
-                </a:solidFill>
-              </a:defRPr>
-            </a:pPr>
-            <a:r>
-              <a:t>• Menos retrasos críticos por alertas tempranas en ruta de obra.</a:t>
-            </a:r>
-          </a:p>
-          <a:p>
-            <a:pPr>
-              <a:spcAft>
-                <a:spcPts val="1200"/>
-              </a:spcAft>
-              <a:defRPr sz="1900">
-                <a:solidFill>
-                  <a:srgbClr val="242C36"/>
-                </a:solidFill>
-              </a:defRPr>
-            </a:pPr>
-            <a:r>
-              <a:t>• Mayor productividad al detectar frentes subutilizados.</a:t>
-            </a:r>
-          </a:p>
-          <a:p>
-            <a:pPr>
-              <a:spcAft>
-                <a:spcPts val="1200"/>
-              </a:spcAft>
-              <a:defRPr sz="1900">
-                <a:solidFill>
-                  <a:srgbClr val="242C36"/>
-                </a:solidFill>
-              </a:defRPr>
-            </a:pPr>
-            <a:r>
-              <a:t>• Menos reprocesos por mejor coordinación diseño-campo.</a:t>
-            </a:r>
-          </a:p>
-          <a:p>
-            <a:pPr>
-              <a:spcAft>
-                <a:spcPts val="1200"/>
-              </a:spcAft>
-              <a:defRPr sz="1900">
-                <a:solidFill>
-                  <a:srgbClr val="242C36"/>
-                </a:solidFill>
-              </a:defRPr>
-            </a:pPr>
-            <a:r>
-              <a:t>• Mejor seguridad con monitoreo de comportamientos de riesgo.</a:t>
-            </a:r>
-          </a:p>
-          <a:p>
-            <a:pPr>
-              <a:spcAft>
-                <a:spcPts val="1200"/>
-              </a:spcAft>
-              <a:defRPr sz="1900">
-                <a:solidFill>
-                  <a:srgbClr val="242C36"/>
-                </a:solidFill>
-              </a:defRPr>
-            </a:pPr>
-            <a:r>
-              <a:t>• Más confianza para inversionistas por trazabilidad y control.</a:t>
-            </a:r>
-          </a:p>
-        </p:txBody>
-      </p:sp>
-      <p:pic>
-        <p:nvPicPr>
-          <p:cNvPr id="6" name="Picture 5" descr="opening.png"/>
-          <p:cNvPicPr>
-            <a:picLocks noChangeAspect="1"/>
-          </p:cNvPicPr>
-          <p:nvPr/>
-        </p:nvPicPr>
-        <p:blipFill>
-          <a:blip r:embed="rId2"/>
-          <a:stretch>
-            <a:fillRect/>
-          </a:stretch>
-        </p:blipFill>
-        <p:spPr>
-          <a:xfrm>
-            <a:off x="7543800" y="1325880"/>
-            <a:ext cx="4160520" cy="4800600"/>
-          </a:xfrm>
-          <a:prstGeom prst="rect">
-            <a:avLst/>
-          </a:prstGeom>
-        </p:spPr>
-      </p:pic>
-      <p:sp>
-        <p:nvSpPr>
-          <p:cNvPr id="7" name="Rectangle 6"/>
-          <p:cNvSpPr/>
-          <p:nvPr/>
-        </p:nvSpPr>
-        <p:spPr>
-          <a:xfrm>
-            <a:off x="594360" y="6446520"/>
-            <a:ext cx="11018520" cy="18288"/>
-          </a:xfrm>
-          <a:prstGeom prst="rect">
-            <a:avLst/>
-          </a:prstGeom>
-          <a:solidFill>
-            <a:srgbClr val="008D96"/>
-          </a:solidFill>
-          <a:ln>
-            <a:noFill/>
-          </a:ln>
-        </p:spPr>
-        <p:style>
-          <a:lnRef idx="1">
-            <a:schemeClr val="accent1"/>
-          </a:lnRef>
-          <a:fillRef idx="3">
-            <a:schemeClr val="accent1"/>
-          </a:fillRef>
-          <a:effectRef idx="2">
-            <a:schemeClr val="accent1"/>
-          </a:effectRef>
-          <a:fontRef idx="minor">
-            <a:schemeClr val="lt1"/>
-          </a:fontRef>
-        </p:style>
-        <p:txBody>
-          <a:bodyPr rtlCol="0" anchor="ctr"/>
-          <a:lstStyle/>
-          <a:p>
-            <a:pPr algn="ctr"/>
-          </a:p>
-        </p:txBody>
-      </p:sp>
-      <p:sp>
-        <p:nvSpPr>
-          <p:cNvPr id="8" name="TextBox 7"/>
-          <p:cNvSpPr txBox="1"/>
-          <p:nvPr/>
-        </p:nvSpPr>
-        <p:spPr>
-          <a:xfrm>
-            <a:off x="10698480" y="6492240"/>
-            <a:ext cx="731520" cy="274320"/>
-          </a:xfrm>
-          <a:prstGeom prst="rect">
-            <a:avLst/>
-          </a:prstGeom>
-          <a:noFill/>
-        </p:spPr>
-        <p:txBody>
-          <a:bodyPr wrap="none">
-            <a:spAutoFit/>
-          </a:bodyPr>
-          <a:lstStyle/>
-          <a:p>
-            <a:pPr algn="r">
-              <a:defRPr sz="900">
-                <a:solidFill>
-                  <a:srgbClr val="606C79"/>
-                </a:solidFill>
-              </a:defRPr>
-            </a:pPr>
-            <a:r>
-              <a:t>06</a:t>
-            </a:r>
-          </a:p>
-        </p:txBody>
-      </p:sp>
-    </p:spTree>
-  </p:cSld>
-  <p:clrMapOvr>
-    <a:masterClrMapping/>
-  </p:clrMapOvr>
-</p:sld>
-</file>
-
-<file path=ppt/slides/slide7.xml><?xml version="1.0" encoding="utf-8"?>
-<p:sld xmlns:a="http://schemas.openxmlformats.org/drawingml/2006/main" xmlns:p="http://schemas.openxmlformats.org/presentationml/2006/main" xmlns:r="http://schemas.openxmlformats.org/officeDocument/2006/relationships">
-  <p:cSld>
-    <p:spTree>
-      <p:nvGrpSpPr>
-        <p:cNvPr id="1" name=""/>
-        <p:cNvGrpSpPr/>
-        <p:nvPr/>
-      </p:nvGrpSpPr>
-      <p:grpSpPr/>
-      <p:sp>
-        <p:nvSpPr>
-          <p:cNvPr id="2" name="Rectangle 1"/>
-          <p:cNvSpPr/>
-          <p:nvPr/>
-        </p:nvSpPr>
-        <p:spPr>
-          <a:xfrm>
-            <a:off x="0" y="0"/>
-            <a:ext cx="12191695" cy="6858000"/>
-          </a:xfrm>
-          <a:prstGeom prst="rect">
-            <a:avLst/>
-          </a:prstGeom>
-          <a:solidFill>
-            <a:srgbClr val="F6F8FA"/>
-          </a:solidFill>
-          <a:ln>
-            <a:noFill/>
-          </a:ln>
-        </p:spPr>
-        <p:style>
-          <a:lnRef idx="1">
-            <a:schemeClr val="accent1"/>
-          </a:lnRef>
-          <a:fillRef idx="3">
-            <a:schemeClr val="accent1"/>
-          </a:fillRef>
-          <a:effectRef idx="2">
-            <a:schemeClr val="accent1"/>
-          </a:effectRef>
-          <a:fontRef idx="minor">
-            <a:schemeClr val="lt1"/>
-          </a:fontRef>
-        </p:style>
-        <p:txBody>
-          <a:bodyPr rtlCol="0" anchor="ctr"/>
-          <a:lstStyle/>
-          <a:p>
-            <a:pPr algn="ctr"/>
-          </a:p>
-        </p:txBody>
-      </p:sp>
-      <p:sp>
-        <p:nvSpPr>
-          <p:cNvPr id="3" name="TextBox 2"/>
-          <p:cNvSpPr txBox="1"/>
-          <p:nvPr/>
-        </p:nvSpPr>
-        <p:spPr>
-          <a:xfrm>
-            <a:off x="594360" y="347472"/>
-            <a:ext cx="7680960" cy="1097280"/>
-          </a:xfrm>
-          <a:prstGeom prst="rect">
-            <a:avLst/>
-          </a:prstGeom>
-          <a:noFill/>
-        </p:spPr>
-        <p:txBody>
-          <a:bodyPr wrap="none">
-            <a:spAutoFit/>
-          </a:bodyPr>
-          <a:lstStyle/>
-          <a:p>
-            <a:pPr>
-              <a:defRPr sz="3000" b="1">
-                <a:solidFill>
-                  <a:srgbClr val="132334"/>
-                </a:solidFill>
-              </a:defRPr>
-            </a:pPr>
-            <a:r>
-              <a:t>Valor para estudiantes: empleabilidad real</a:t>
-            </a:r>
-          </a:p>
-        </p:txBody>
-      </p:sp>
-      <p:sp>
-        <p:nvSpPr>
-          <p:cNvPr id="4" name="TextBox 3"/>
-          <p:cNvSpPr txBox="1"/>
-          <p:nvPr/>
-        </p:nvSpPr>
-        <p:spPr>
-          <a:xfrm>
-            <a:off x="621792" y="987552"/>
-            <a:ext cx="7772400" cy="731520"/>
-          </a:xfrm>
-          <a:prstGeom prst="rect">
-            <a:avLst/>
-          </a:prstGeom>
-          <a:noFill/>
-        </p:spPr>
-        <p:txBody>
-          <a:bodyPr wrap="none">
-            <a:spAutoFit/>
-          </a:bodyPr>
-          <a:lstStyle/>
-          <a:p>
-            <a:pPr>
-              <a:defRPr sz="1400">
-                <a:solidFill>
-                  <a:srgbClr val="606C79"/>
-                </a:solidFill>
-              </a:defRPr>
-            </a:pPr>
-            <a:r>
-              <a:t>Perfil híbrido Civil + Sistemas como ventaja profesional</a:t>
-            </a:r>
-          </a:p>
-        </p:txBody>
-      </p:sp>
-      <p:sp>
-        <p:nvSpPr>
-          <p:cNvPr id="5" name="TextBox 4"/>
-          <p:cNvSpPr txBox="1"/>
-          <p:nvPr/>
-        </p:nvSpPr>
-        <p:spPr>
-          <a:xfrm>
-            <a:off x="713232" y="1600200"/>
-            <a:ext cx="6629400" cy="4480560"/>
-          </a:xfrm>
-          <a:prstGeom prst="rect">
-            <a:avLst/>
-          </a:prstGeom>
-          <a:noFill/>
-        </p:spPr>
-        <p:txBody>
-          <a:bodyPr wrap="none">
-            <a:spAutoFit/>
-          </a:bodyPr>
-          <a:lstStyle/>
-          <a:p>
-            <a:pPr>
-              <a:spcAft>
-                <a:spcPts val="1200"/>
-              </a:spcAft>
-              <a:defRPr sz="2100">
-                <a:solidFill>
-                  <a:srgbClr val="242C36"/>
-                </a:solidFill>
-              </a:defRPr>
-            </a:pPr>
-            <a:r>
-              <a:t>• Comprender obra + modelar datos = perfil altamente demandado.</a:t>
-            </a:r>
-          </a:p>
-          <a:p>
-            <a:pPr>
-              <a:spcAft>
-                <a:spcPts val="1200"/>
-              </a:spcAft>
-              <a:defRPr sz="1900">
-                <a:solidFill>
-                  <a:srgbClr val="242C36"/>
-                </a:solidFill>
-              </a:defRPr>
-            </a:pPr>
-            <a:r>
-              <a:t>• Nuevos roles: planner analítico, coordinador BIM-datos, PM digital.</a:t>
-            </a:r>
-          </a:p>
-          <a:p>
-            <a:pPr>
-              <a:spcAft>
-                <a:spcPts val="1200"/>
-              </a:spcAft>
-              <a:defRPr sz="1900">
-                <a:solidFill>
-                  <a:srgbClr val="242C36"/>
-                </a:solidFill>
-              </a:defRPr>
-            </a:pPr>
-            <a:r>
-              <a:t>• Competencias clave: SQL, dashboards, lectura de KPIs de obra, IA aplicada.</a:t>
-            </a:r>
-          </a:p>
-          <a:p>
-            <a:pPr>
-              <a:spcAft>
-                <a:spcPts val="1200"/>
-              </a:spcAft>
-              <a:defRPr sz="1900">
-                <a:solidFill>
-                  <a:srgbClr val="242C36"/>
-                </a:solidFill>
-              </a:defRPr>
-            </a:pPr>
-            <a:r>
-              <a:t>• La práctica profesional migrará de reporte manual a gestión asistida por datos.</a:t>
-            </a:r>
-          </a:p>
-          <a:p>
-            <a:pPr>
-              <a:spcAft>
-                <a:spcPts val="1200"/>
-              </a:spcAft>
-              <a:defRPr sz="1900">
-                <a:solidFill>
-                  <a:srgbClr val="242C36"/>
-                </a:solidFill>
-              </a:defRPr>
-            </a:pPr>
-            <a:r>
-              <a:t>• No reemplazo: mayor capacidad de criterio técnico y liderazgo.</a:t>
-            </a:r>
-          </a:p>
-        </p:txBody>
-      </p:sp>
-      <p:pic>
-        <p:nvPicPr>
-          <p:cNvPr id="6" name="Picture 5" descr="students.png"/>
-          <p:cNvPicPr>
-            <a:picLocks noChangeAspect="1"/>
-          </p:cNvPicPr>
-          <p:nvPr/>
-        </p:nvPicPr>
-        <p:blipFill>
-          <a:blip r:embed="rId2"/>
-          <a:stretch>
-            <a:fillRect/>
-          </a:stretch>
-        </p:blipFill>
-        <p:spPr>
-          <a:xfrm>
-            <a:off x="7543800" y="1325880"/>
-            <a:ext cx="4160520" cy="4800600"/>
-          </a:xfrm>
-          <a:prstGeom prst="rect">
-            <a:avLst/>
-          </a:prstGeom>
-        </p:spPr>
-      </p:pic>
-      <p:sp>
-        <p:nvSpPr>
-          <p:cNvPr id="7" name="Rectangle 6"/>
-          <p:cNvSpPr/>
-          <p:nvPr/>
-        </p:nvSpPr>
-        <p:spPr>
-          <a:xfrm>
-            <a:off x="594360" y="6446520"/>
-            <a:ext cx="11018520" cy="18288"/>
-          </a:xfrm>
-          <a:prstGeom prst="rect">
-            <a:avLst/>
-          </a:prstGeom>
-          <a:solidFill>
-            <a:srgbClr val="008D96"/>
-          </a:solidFill>
-          <a:ln>
-            <a:noFill/>
-          </a:ln>
-        </p:spPr>
-        <p:style>
-          <a:lnRef idx="1">
-            <a:schemeClr val="accent1"/>
-          </a:lnRef>
-          <a:fillRef idx="3">
-            <a:schemeClr val="accent1"/>
-          </a:fillRef>
-          <a:effectRef idx="2">
-            <a:schemeClr val="accent1"/>
-          </a:effectRef>
-          <a:fontRef idx="minor">
-            <a:schemeClr val="lt1"/>
-          </a:fontRef>
-        </p:style>
-        <p:txBody>
-          <a:bodyPr rtlCol="0" anchor="ctr"/>
-          <a:lstStyle/>
-          <a:p>
-            <a:pPr algn="ctr"/>
-          </a:p>
-        </p:txBody>
-      </p:sp>
-      <p:sp>
-        <p:nvSpPr>
-          <p:cNvPr id="8" name="TextBox 7"/>
-          <p:cNvSpPr txBox="1"/>
-          <p:nvPr/>
-        </p:nvSpPr>
-        <p:spPr>
-          <a:xfrm>
-            <a:off x="10698480" y="6492240"/>
-            <a:ext cx="731520" cy="274320"/>
-          </a:xfrm>
-          <a:prstGeom prst="rect">
-            <a:avLst/>
-          </a:prstGeom>
-          <a:noFill/>
-        </p:spPr>
-        <p:txBody>
-          <a:bodyPr wrap="none">
-            <a:spAutoFit/>
-          </a:bodyPr>
-          <a:lstStyle/>
-          <a:p>
-            <a:pPr algn="r">
-              <a:defRPr sz="900">
-                <a:solidFill>
-                  <a:srgbClr val="606C79"/>
-                </a:solidFill>
-              </a:defRPr>
-            </a:pPr>
-            <a:r>
-              <a:t>07</a:t>
-            </a:r>
-          </a:p>
-        </p:txBody>
-      </p:sp>
-    </p:spTree>
-  </p:cSld>
-  <p:clrMapOvr>
-    <a:masterClrMapping/>
-  </p:clrMapOvr>
-</p:sld>
-</file>
-
-<file path=ppt/slides/slide8.xml><?xml version="1.0" encoding="utf-8"?>
-<p:sld xmlns:a="http://schemas.openxmlformats.org/drawingml/2006/main" xmlns:p="http://schemas.openxmlformats.org/presentationml/2006/main" xmlns:r="http://schemas.openxmlformats.org/officeDocument/2006/relationships">
-  <p:cSld>
-    <p:spTree>
-      <p:nvGrpSpPr>
-        <p:cNvPr id="1" name=""/>
-        <p:cNvGrpSpPr/>
-        <p:nvPr/>
-      </p:nvGrpSpPr>
-      <p:grpSpPr/>
-      <p:sp>
-        <p:nvSpPr>
-          <p:cNvPr id="2" name="Rectangle 1"/>
-          <p:cNvSpPr/>
-          <p:nvPr/>
-        </p:nvSpPr>
-        <p:spPr>
-          <a:xfrm>
-            <a:off x="0" y="0"/>
-            <a:ext cx="12191695" cy="6858000"/>
-          </a:xfrm>
-          <a:prstGeom prst="rect">
-            <a:avLst/>
-          </a:prstGeom>
-          <a:solidFill>
-            <a:srgbClr val="132334"/>
-          </a:solidFill>
-          <a:ln>
-            <a:noFill/>
-          </a:ln>
-        </p:spPr>
-        <p:style>
-          <a:lnRef idx="1">
-            <a:schemeClr val="accent1"/>
-          </a:lnRef>
-          <a:fillRef idx="3">
-            <a:schemeClr val="accent1"/>
-          </a:fillRef>
-          <a:effectRef idx="2">
-            <a:schemeClr val="accent1"/>
-          </a:effectRef>
-          <a:fontRef idx="minor">
-            <a:schemeClr val="lt1"/>
-          </a:fontRef>
-        </p:style>
-        <p:txBody>
-          <a:bodyPr rtlCol="0" anchor="ctr"/>
-          <a:lstStyle/>
-          <a:p>
-            <a:pPr algn="ctr"/>
-          </a:p>
-        </p:txBody>
-      </p:sp>
-      <p:sp>
-        <p:nvSpPr>
-          <p:cNvPr id="3" name="TextBox 2"/>
-          <p:cNvSpPr txBox="1"/>
-          <p:nvPr/>
-        </p:nvSpPr>
-        <p:spPr>
-          <a:xfrm>
-            <a:off x="594360" y="347472"/>
-            <a:ext cx="7680960" cy="1097280"/>
-          </a:xfrm>
-          <a:prstGeom prst="rect">
-            <a:avLst/>
-          </a:prstGeom>
-          <a:noFill/>
-        </p:spPr>
-        <p:txBody>
-          <a:bodyPr wrap="none">
-            <a:spAutoFit/>
-          </a:bodyPr>
-          <a:lstStyle/>
-          <a:p>
-            <a:pPr>
-              <a:defRPr sz="3000" b="1">
-                <a:solidFill>
-                  <a:srgbClr val="FFFFFF"/>
-                </a:solidFill>
-              </a:defRPr>
-            </a:pPr>
-            <a:r>
-              <a:t>Caso de estudio: Torre Santiago (ficticio, plausible)</a:t>
-            </a:r>
-          </a:p>
-        </p:txBody>
-      </p:sp>
-      <p:sp>
-        <p:nvSpPr>
-          <p:cNvPr id="4" name="TextBox 3"/>
-          <p:cNvSpPr txBox="1"/>
-          <p:nvPr/>
-        </p:nvSpPr>
-        <p:spPr>
-          <a:xfrm>
-            <a:off x="621792" y="987552"/>
-            <a:ext cx="7772400" cy="731520"/>
-          </a:xfrm>
-          <a:prstGeom prst="rect">
-            <a:avLst/>
-          </a:prstGeom>
-          <a:noFill/>
-        </p:spPr>
-        <p:txBody>
-          <a:bodyPr wrap="none">
-            <a:spAutoFit/>
-          </a:bodyPr>
-          <a:lstStyle/>
-          <a:p>
-            <a:pPr>
-              <a:defRPr sz="1400">
-                <a:solidFill>
-                  <a:srgbClr val="FFFFFF"/>
-                </a:solidFill>
-              </a:defRPr>
-            </a:pPr>
-            <a:r>
-              <a:t>Edificio residencial de 22 niveles en Guayaquil norte</a:t>
-            </a:r>
-          </a:p>
-        </p:txBody>
-      </p:sp>
-      <p:pic>
-        <p:nvPicPr>
-          <p:cNvPr id="5" name="Picture 4" descr="case.png"/>
-          <p:cNvPicPr>
-            <a:picLocks noChangeAspect="1"/>
-          </p:cNvPicPr>
-          <p:nvPr/>
-        </p:nvPicPr>
-        <p:blipFill>
-          <a:blip r:embed="rId2"/>
-          <a:stretch>
-            <a:fillRect/>
-          </a:stretch>
-        </p:blipFill>
-        <p:spPr>
-          <a:xfrm>
-            <a:off x="594360" y="1645920"/>
-            <a:ext cx="11018520" cy="4389120"/>
-          </a:xfrm>
-          <a:prstGeom prst="rect">
-            <a:avLst/>
-          </a:prstGeom>
-        </p:spPr>
-      </p:pic>
-      <p:sp>
-        <p:nvSpPr>
-          <p:cNvPr id="6" name="Rectangle 5"/>
-          <p:cNvSpPr/>
-          <p:nvPr/>
-        </p:nvSpPr>
-        <p:spPr>
-          <a:xfrm>
-            <a:off x="594360" y="6446520"/>
-            <a:ext cx="11018520" cy="18288"/>
-          </a:xfrm>
-          <a:prstGeom prst="rect">
-            <a:avLst/>
-          </a:prstGeom>
-          <a:solidFill>
-            <a:srgbClr val="008D96"/>
-          </a:solidFill>
-          <a:ln>
-            <a:noFill/>
-          </a:ln>
-        </p:spPr>
-        <p:style>
-          <a:lnRef idx="1">
-            <a:schemeClr val="accent1"/>
-          </a:lnRef>
-          <a:fillRef idx="3">
-            <a:schemeClr val="accent1"/>
-          </a:fillRef>
-          <a:effectRef idx="2">
-            <a:schemeClr val="accent1"/>
-          </a:effectRef>
-          <a:fontRef idx="minor">
-            <a:schemeClr val="lt1"/>
-          </a:fontRef>
-        </p:style>
-        <p:txBody>
-          <a:bodyPr rtlCol="0" anchor="ctr"/>
-          <a:lstStyle/>
-          <a:p>
-            <a:pPr algn="ctr"/>
-          </a:p>
-        </p:txBody>
-      </p:sp>
-      <p:sp>
-        <p:nvSpPr>
           <p:cNvPr id="7" name="TextBox 6"/>
-          <p:cNvSpPr txBox="1"/>
-          <p:nvPr/>
-        </p:nvSpPr>
-        <p:spPr>
-          <a:xfrm>
-            <a:off x="10698480" y="6492240"/>
-            <a:ext cx="731520" cy="274320"/>
-          </a:xfrm>
-          <a:prstGeom prst="rect">
-            <a:avLst/>
-          </a:prstGeom>
-          <a:noFill/>
-        </p:spPr>
-        <p:txBody>
-          <a:bodyPr wrap="none">
-            <a:spAutoFit/>
-          </a:bodyPr>
-          <a:lstStyle/>
-          <a:p>
-            <a:pPr algn="r">
-              <a:defRPr sz="900">
-                <a:solidFill>
-                  <a:srgbClr val="FFFFFF"/>
-                </a:solidFill>
-              </a:defRPr>
-            </a:pPr>
-            <a:r>
-              <a:t>08</a:t>
-            </a:r>
-          </a:p>
-        </p:txBody>
-      </p:sp>
-    </p:spTree>
-  </p:cSld>
-  <p:clrMapOvr>
-    <a:masterClrMapping/>
-  </p:clrMapOvr>
-</p:sld>
-</file>
-
-<file path=ppt/slides/slide9.xml><?xml version="1.0" encoding="utf-8"?>
-<p:sld xmlns:a="http://schemas.openxmlformats.org/drawingml/2006/main" xmlns:p="http://schemas.openxmlformats.org/presentationml/2006/main" xmlns:r="http://schemas.openxmlformats.org/officeDocument/2006/relationships">
-  <p:cSld>
-    <p:spTree>
-      <p:nvGrpSpPr>
-        <p:cNvPr id="1" name=""/>
-        <p:cNvGrpSpPr/>
-        <p:nvPr/>
-      </p:nvGrpSpPr>
-      <p:grpSpPr/>
-      <p:sp>
-        <p:nvSpPr>
-          <p:cNvPr id="2" name="Rectangle 1"/>
-          <p:cNvSpPr/>
-          <p:nvPr/>
-        </p:nvSpPr>
-        <p:spPr>
-          <a:xfrm>
-            <a:off x="0" y="0"/>
-            <a:ext cx="12191695" cy="6858000"/>
-          </a:xfrm>
-          <a:prstGeom prst="rect">
-            <a:avLst/>
-          </a:prstGeom>
-          <a:solidFill>
-            <a:srgbClr val="F6F8FA"/>
-          </a:solidFill>
-          <a:ln>
-            <a:noFill/>
-          </a:ln>
-        </p:spPr>
-        <p:style>
-          <a:lnRef idx="1">
-            <a:schemeClr val="accent1"/>
-          </a:lnRef>
-          <a:fillRef idx="3">
-            <a:schemeClr val="accent1"/>
-          </a:fillRef>
-          <a:effectRef idx="2">
-            <a:schemeClr val="accent1"/>
-          </a:effectRef>
-          <a:fontRef idx="minor">
-            <a:schemeClr val="lt1"/>
-          </a:fontRef>
-        </p:style>
-        <p:txBody>
-          <a:bodyPr rtlCol="0" anchor="ctr"/>
-          <a:lstStyle/>
-          <a:p>
-            <a:pPr algn="ctr"/>
-          </a:p>
-        </p:txBody>
-      </p:sp>
-      <p:sp>
-        <p:nvSpPr>
-          <p:cNvPr id="3" name="TextBox 2"/>
-          <p:cNvSpPr txBox="1"/>
-          <p:nvPr/>
-        </p:nvSpPr>
-        <p:spPr>
-          <a:xfrm>
-            <a:off x="594360" y="347472"/>
-            <a:ext cx="7680960" cy="1097280"/>
-          </a:xfrm>
-          <a:prstGeom prst="rect">
-            <a:avLst/>
-          </a:prstGeom>
-          <a:noFill/>
-        </p:spPr>
-        <p:txBody>
-          <a:bodyPr wrap="none">
-            <a:spAutoFit/>
-          </a:bodyPr>
-          <a:lstStyle/>
-          <a:p>
-            <a:pPr>
-              <a:defRPr sz="3000" b="1">
-                <a:solidFill>
-                  <a:srgbClr val="132334"/>
-                </a:solidFill>
-              </a:defRPr>
-            </a:pPr>
-            <a:r>
-              <a:t>Torre Santiago: línea base</a:t>
-            </a:r>
-          </a:p>
-        </p:txBody>
-      </p:sp>
-      <p:sp>
-        <p:nvSpPr>
-          <p:cNvPr id="4" name="TextBox 3"/>
-          <p:cNvSpPr txBox="1"/>
-          <p:nvPr/>
-        </p:nvSpPr>
-        <p:spPr>
-          <a:xfrm>
-            <a:off x="621792" y="987552"/>
-            <a:ext cx="7772400" cy="731520"/>
-          </a:xfrm>
-          <a:prstGeom prst="rect">
-            <a:avLst/>
-          </a:prstGeom>
-          <a:noFill/>
-        </p:spPr>
-        <p:txBody>
-          <a:bodyPr wrap="none">
-            <a:spAutoFit/>
-          </a:bodyPr>
-          <a:lstStyle/>
-          <a:p>
-            <a:pPr>
-              <a:defRPr sz="1400">
-                <a:solidFill>
-                  <a:srgbClr val="606C79"/>
-                </a:solidFill>
-              </a:defRPr>
-            </a:pPr>
-            <a:r>
-              <a:t>Semana 24 de un plan de 14 meses</a:t>
-            </a:r>
-          </a:p>
-        </p:txBody>
-      </p:sp>
-      <p:sp>
-        <p:nvSpPr>
-          <p:cNvPr id="5" name="TextBox 4"/>
-          <p:cNvSpPr txBox="1"/>
-          <p:nvPr/>
-        </p:nvSpPr>
-        <p:spPr>
-          <a:xfrm>
-            <a:off x="713232" y="1600200"/>
-            <a:ext cx="6629400" cy="4480560"/>
-          </a:xfrm>
-          <a:prstGeom prst="rect">
-            <a:avLst/>
-          </a:prstGeom>
-          <a:noFill/>
-        </p:spPr>
-        <p:txBody>
-          <a:bodyPr wrap="none">
-            <a:spAutoFit/>
-          </a:bodyPr>
-          <a:lstStyle/>
-          <a:p>
-            <a:pPr>
-              <a:spcAft>
-                <a:spcPts val="1200"/>
-              </a:spcAft>
-              <a:defRPr sz="2100">
-                <a:solidFill>
-                  <a:srgbClr val="242C36"/>
-                </a:solidFill>
-              </a:defRPr>
-            </a:pPr>
-            <a:r>
-              <a:t>• Presupuesto contractual: USD 14.8 millones.</a:t>
-            </a:r>
-          </a:p>
-          <a:p>
-            <a:pPr>
-              <a:spcAft>
-                <a:spcPts val="1200"/>
-              </a:spcAft>
-              <a:defRPr sz="1900">
-                <a:solidFill>
-                  <a:srgbClr val="242C36"/>
-                </a:solidFill>
-              </a:defRPr>
-            </a:pPr>
-            <a:r>
-              <a:t>• Avance planificado: 58% | avance real: 49%.</a:t>
-            </a:r>
-          </a:p>
-          <a:p>
-            <a:pPr>
-              <a:spcAft>
-                <a:spcPts val="1200"/>
-              </a:spcAft>
-              <a:defRPr sz="1900">
-                <a:solidFill>
-                  <a:srgbClr val="242C36"/>
-                </a:solidFill>
-              </a:defRPr>
-            </a:pPr>
-            <a:r>
-              <a:t>• Equipos críticos: grúa torre, bomba de hormigón, encofrado.</a:t>
-            </a:r>
-          </a:p>
-          <a:p>
-            <a:pPr>
-              <a:spcAft>
-                <a:spcPts val="1200"/>
-              </a:spcAft>
-              <a:defRPr sz="1900">
-                <a:solidFill>
-                  <a:srgbClr val="242C36"/>
-                </a:solidFill>
-              </a:defRPr>
-            </a:pPr>
-            <a:r>
-              <a:t>• Incidentes de seguridad leves: 6 (meta trimestral: &lt;=2).</a:t>
-            </a:r>
-          </a:p>
-          <a:p>
-            <a:pPr>
-              <a:spcAft>
-                <a:spcPts val="1200"/>
-              </a:spcAft>
-              <a:defRPr sz="1900">
-                <a:solidFill>
-                  <a:srgbClr val="242C36"/>
-                </a:solidFill>
-              </a:defRPr>
-            </a:pPr>
-            <a:r>
-              <a:t>• Riesgo de caja: certificación del hito comercial en 5 semanas.</a:t>
-            </a:r>
-          </a:p>
-        </p:txBody>
-      </p:sp>
-      <p:pic>
-        <p:nvPicPr>
-          <p:cNvPr id="6" name="Picture 5" descr="case.png"/>
-          <p:cNvPicPr>
-            <a:picLocks noChangeAspect="1"/>
-          </p:cNvPicPr>
-          <p:nvPr/>
-        </p:nvPicPr>
-        <p:blipFill>
-          <a:blip r:embed="rId2"/>
-          <a:stretch>
-            <a:fillRect/>
-          </a:stretch>
-        </p:blipFill>
-        <p:spPr>
-          <a:xfrm>
-            <a:off x="7543800" y="1325880"/>
-            <a:ext cx="4160520" cy="4800600"/>
-          </a:xfrm>
-          <a:prstGeom prst="rect">
-            <a:avLst/>
-          </a:prstGeom>
-        </p:spPr>
-      </p:pic>
-      <p:sp>
-        <p:nvSpPr>
-          <p:cNvPr id="7" name="Rectangle 6"/>
-          <p:cNvSpPr/>
-          <p:nvPr/>
-        </p:nvSpPr>
-        <p:spPr>
-          <a:xfrm>
-            <a:off x="594360" y="6446520"/>
-            <a:ext cx="11018520" cy="18288"/>
-          </a:xfrm>
-          <a:prstGeom prst="rect">
-            <a:avLst/>
-          </a:prstGeom>
-          <a:solidFill>
-            <a:srgbClr val="008D96"/>
-          </a:solidFill>
-          <a:ln>
-            <a:noFill/>
-          </a:ln>
-        </p:spPr>
-        <p:style>
-          <a:lnRef idx="1">
-            <a:schemeClr val="accent1"/>
-          </a:lnRef>
-          <a:fillRef idx="3">
-            <a:schemeClr val="accent1"/>
-          </a:fillRef>
-          <a:effectRef idx="2">
-            <a:schemeClr val="accent1"/>
-          </a:effectRef>
-          <a:fontRef idx="minor">
-            <a:schemeClr val="lt1"/>
-          </a:fontRef>
-        </p:style>
-        <p:txBody>
-          <a:bodyPr rtlCol="0" anchor="ctr"/>
-          <a:lstStyle/>
-          <a:p>
-            <a:pPr algn="ctr"/>
-          </a:p>
-        </p:txBody>
-      </p:sp>
-      <p:sp>
-        <p:nvSpPr>
-          <p:cNvPr id="8" name="TextBox 7"/>
           <p:cNvSpPr txBox="1"/>
           <p:nvPr/>
         </p:nvSpPr>
